--- a/outputs/智能專案經理AIPM_競賽提案.pptx
+++ b/outputs/智能專案經理AIPM_競賽提案.pptx
@@ -6,7 +6,7 @@
     <p:sldMasterId id="2147483675" r:id="rId2"/>
   </p:sldMasterIdLst>
   <p:notesMasterIdLst>
-    <p:notesMasterId r:id="rId10"/>
+    <p:notesMasterId r:id="rId12"/>
   </p:notesMasterIdLst>
   <p:sldIdLst>
     <p:sldId id="2147482890" r:id="rId3"/>
@@ -16,6 +16,8 @@
     <p:sldId id="261" r:id="rId7"/>
     <p:sldId id="2147482908" r:id="rId8"/>
     <p:sldId id="2147482905" r:id="rId9"/>
+    <p:sldId id="2147482910" r:id="rId10"/>
+    <p:sldId id="2147482909" r:id="rId11"/>
   </p:sldIdLst>
   <p:sldSz cx="12192000" cy="6858000"/>
   <p:notesSz cx="6858000" cy="9144000"/>
@@ -125,7 +127,7 @@
 <file path=ppt/revisionInfo.xml><?xml version="1.0" encoding="utf-8"?>
 <p1510:revInfo xmlns:a="http://schemas.openxmlformats.org/drawingml/2006/main" xmlns:r="http://schemas.openxmlformats.org/officeDocument/2006/relationships" xmlns:p1510="http://schemas.microsoft.com/office/powerpoint/2015/10/main">
   <p1510:revLst>
-    <p1510:client id="{AD36F68F-DF47-43A1-B83C-047BC6B0B356}" v="18" dt="2026-07-10T08:19:12.368"/>
+    <p1510:client id="{FD57485C-5D48-4BBF-895E-B97C08E7F4EF}" v="5" dt="2026-07-13T12:01:57.312"/>
   </p1510:revLst>
 </p1510:revInfo>
 </file>
@@ -145,28 +147,12 @@
           <pc:docMk/>
           <pc:sldMk cId="0" sldId="261"/>
         </pc:sldMkLst>
-        <pc:picChg chg="add del mod modCrop">
-          <ac:chgData name="文浩 郭" userId="6ccc17ab3add3069" providerId="LiveId" clId="{A16DFF17-4FF3-4109-A435-57F25017F4B7}" dt="2026-07-10T07:41:30.989" v="1224" actId="478"/>
-          <ac:picMkLst>
-            <pc:docMk/>
-            <pc:sldMk cId="0" sldId="261"/>
-            <ac:picMk id="3" creationId="{6C90DEC4-5E33-D216-A5C0-DEA234C4585D}"/>
-          </ac:picMkLst>
-        </pc:picChg>
         <pc:picChg chg="add mod modCrop">
           <ac:chgData name="文浩 郭" userId="6ccc17ab3add3069" providerId="LiveId" clId="{A16DFF17-4FF3-4109-A435-57F25017F4B7}" dt="2026-07-10T07:41:56.263" v="1235" actId="1076"/>
           <ac:picMkLst>
             <pc:docMk/>
             <pc:sldMk cId="0" sldId="261"/>
             <ac:picMk id="4" creationId="{A5138597-CC39-3990-525C-B741A4109C5C}"/>
-          </ac:picMkLst>
-        </pc:picChg>
-        <pc:picChg chg="del">
-          <ac:chgData name="文浩 郭" userId="6ccc17ab3add3069" providerId="LiveId" clId="{A16DFF17-4FF3-4109-A435-57F25017F4B7}" dt="2026-07-10T06:25:25.216" v="997" actId="478"/>
-          <ac:picMkLst>
-            <pc:docMk/>
-            <pc:sldMk cId="0" sldId="261"/>
-            <ac:picMk id="77" creationId="{00000000-0000-0000-0000-000000000000}"/>
           </ac:picMkLst>
         </pc:picChg>
       </pc:sldChg>
@@ -215,14 +201,6 @@
             <ac:spMk id="4" creationId="{361EB62E-984A-3DF3-8A3D-65088788322C}"/>
           </ac:spMkLst>
         </pc:spChg>
-        <pc:spChg chg="add del mod">
-          <ac:chgData name="文浩 郭" userId="6ccc17ab3add3069" providerId="LiveId" clId="{A16DFF17-4FF3-4109-A435-57F25017F4B7}" dt="2026-07-10T05:38:04.374" v="738" actId="478"/>
-          <ac:spMkLst>
-            <pc:docMk/>
-            <pc:sldMk cId="0" sldId="2147482900"/>
-            <ac:spMk id="5" creationId="{F08B0718-708D-F028-1E0B-7DEE9DABCDE8}"/>
-          </ac:spMkLst>
-        </pc:spChg>
         <pc:spChg chg="mod">
           <ac:chgData name="文浩 郭" userId="6ccc17ab3add3069" providerId="LiveId" clId="{A16DFF17-4FF3-4109-A435-57F25017F4B7}" dt="2026-07-10T05:47:26.893" v="977" actId="20577"/>
           <ac:spMkLst>
@@ -231,36 +209,12 @@
             <ac:spMk id="8" creationId="{A2256F3E-78CC-D43C-9D54-C9677A2BA704}"/>
           </ac:spMkLst>
         </pc:spChg>
-        <pc:spChg chg="del mod">
-          <ac:chgData name="文浩 郭" userId="6ccc17ab3add3069" providerId="LiveId" clId="{A16DFF17-4FF3-4109-A435-57F25017F4B7}" dt="2026-07-10T05:38:07.345" v="740" actId="478"/>
-          <ac:spMkLst>
-            <pc:docMk/>
-            <pc:sldMk cId="0" sldId="2147482900"/>
-            <ac:spMk id="9" creationId="{3B34A4BD-52D2-D49A-0D66-E25DAC8B1DEB}"/>
-          </ac:spMkLst>
-        </pc:spChg>
         <pc:spChg chg="mod">
           <ac:chgData name="文浩 郭" userId="6ccc17ab3add3069" providerId="LiveId" clId="{A16DFF17-4FF3-4109-A435-57F25017F4B7}" dt="2026-07-10T05:40:45.273" v="831" actId="1076"/>
           <ac:spMkLst>
             <pc:docMk/>
             <pc:sldMk cId="0" sldId="2147482900"/>
             <ac:spMk id="11" creationId="{39D02D02-2C27-2ECD-E196-3D9C10E71E95}"/>
-          </ac:spMkLst>
-        </pc:spChg>
-        <pc:spChg chg="del mod">
-          <ac:chgData name="文浩 郭" userId="6ccc17ab3add3069" providerId="LiveId" clId="{A16DFF17-4FF3-4109-A435-57F25017F4B7}" dt="2026-07-10T05:38:02.400" v="737" actId="478"/>
-          <ac:spMkLst>
-            <pc:docMk/>
-            <pc:sldMk cId="0" sldId="2147482900"/>
-            <ac:spMk id="12" creationId="{CF04CEAE-2150-A06B-C300-A0BD41371A23}"/>
-          </ac:spMkLst>
-        </pc:spChg>
-        <pc:spChg chg="del mod">
-          <ac:chgData name="文浩 郭" userId="6ccc17ab3add3069" providerId="LiveId" clId="{A16DFF17-4FF3-4109-A435-57F25017F4B7}" dt="2026-07-10T05:38:05.875" v="739" actId="478"/>
-          <ac:spMkLst>
-            <pc:docMk/>
-            <pc:sldMk cId="0" sldId="2147482900"/>
-            <ac:spMk id="13" creationId="{24A68DE1-626E-23E9-9FEF-69704EFA22FB}"/>
           </ac:spMkLst>
         </pc:spChg>
         <pc:spChg chg="add mod">
@@ -295,38 +249,6 @@
             <ac:spMk id="38" creationId="{00000000-0000-0000-0000-000000000000}"/>
           </ac:spMkLst>
         </pc:spChg>
-        <pc:grpChg chg="add del mod">
-          <ac:chgData name="文浩 郭" userId="6ccc17ab3add3069" providerId="LiveId" clId="{A16DFF17-4FF3-4109-A435-57F25017F4B7}" dt="2026-07-10T05:38:05.875" v="739" actId="478"/>
-          <ac:grpSpMkLst>
-            <pc:docMk/>
-            <pc:sldMk cId="0" sldId="2147482900"/>
-            <ac:grpSpMk id="2" creationId="{546B92D7-3924-6616-4105-A67097323C6E}"/>
-          </ac:grpSpMkLst>
-        </pc:grpChg>
-        <pc:grpChg chg="add del mod">
-          <ac:chgData name="文浩 郭" userId="6ccc17ab3add3069" providerId="LiveId" clId="{A16DFF17-4FF3-4109-A435-57F25017F4B7}" dt="2026-07-10T05:38:04.374" v="738" actId="478"/>
-          <ac:grpSpMkLst>
-            <pc:docMk/>
-            <pc:sldMk cId="0" sldId="2147482900"/>
-            <ac:grpSpMk id="6" creationId="{53651885-0DC6-D50A-2138-94CA4A4C5778}"/>
-          </ac:grpSpMkLst>
-        </pc:grpChg>
-        <pc:grpChg chg="add del mod">
-          <ac:chgData name="文浩 郭" userId="6ccc17ab3add3069" providerId="LiveId" clId="{A16DFF17-4FF3-4109-A435-57F25017F4B7}" dt="2026-07-10T05:38:07.345" v="740" actId="478"/>
-          <ac:grpSpMkLst>
-            <pc:docMk/>
-            <pc:sldMk cId="0" sldId="2147482900"/>
-            <ac:grpSpMk id="7" creationId="{CBE46271-0594-76D1-4E81-3A0FD2E05153}"/>
-          </ac:grpSpMkLst>
-        </pc:grpChg>
-        <pc:grpChg chg="add del mod">
-          <ac:chgData name="文浩 郭" userId="6ccc17ab3add3069" providerId="LiveId" clId="{A16DFF17-4FF3-4109-A435-57F25017F4B7}" dt="2026-07-10T05:38:02.400" v="737" actId="478"/>
-          <ac:grpSpMkLst>
-            <pc:docMk/>
-            <pc:sldMk cId="0" sldId="2147482900"/>
-            <ac:grpSpMk id="10" creationId="{5DD7B09D-9047-5581-6312-65853C6F837B}"/>
-          </ac:grpSpMkLst>
-        </pc:grpChg>
         <pc:grpChg chg="add mod">
           <ac:chgData name="文浩 郭" userId="6ccc17ab3add3069" providerId="LiveId" clId="{A16DFF17-4FF3-4109-A435-57F25017F4B7}" dt="2026-07-10T05:44:44.251" v="849" actId="164"/>
           <ac:grpSpMkLst>
@@ -352,97 +274,12 @@
           </ac:grpSpMkLst>
         </pc:grpChg>
       </pc:sldChg>
-      <pc:sldChg chg="modSp del mod">
-        <pc:chgData name="文浩 郭" userId="6ccc17ab3add3069" providerId="LiveId" clId="{A16DFF17-4FF3-4109-A435-57F25017F4B7}" dt="2026-07-10T07:38:49.336" v="1029" actId="47"/>
-        <pc:sldMkLst>
-          <pc:docMk/>
-          <pc:sldMk cId="0" sldId="2147482901"/>
-        </pc:sldMkLst>
-        <pc:spChg chg="mod">
-          <ac:chgData name="文浩 郭" userId="6ccc17ab3add3069" providerId="LiveId" clId="{A16DFF17-4FF3-4109-A435-57F25017F4B7}" dt="2026-07-10T05:49:27.201" v="987" actId="208"/>
-          <ac:spMkLst>
-            <pc:docMk/>
-            <pc:sldMk cId="0" sldId="2147482901"/>
-            <ac:spMk id="47" creationId="{00000000-0000-0000-0000-000000000000}"/>
-          </ac:spMkLst>
-        </pc:spChg>
-        <pc:spChg chg="mod">
-          <ac:chgData name="文浩 郭" userId="6ccc17ab3add3069" providerId="LiveId" clId="{A16DFF17-4FF3-4109-A435-57F25017F4B7}" dt="2026-07-10T05:50:04.047" v="995" actId="403"/>
-          <ac:spMkLst>
-            <pc:docMk/>
-            <pc:sldMk cId="0" sldId="2147482901"/>
-            <ac:spMk id="48" creationId="{00000000-0000-0000-0000-000000000000}"/>
-          </ac:spMkLst>
-        </pc:spChg>
-        <pc:spChg chg="mod">
-          <ac:chgData name="文浩 郭" userId="6ccc17ab3add3069" providerId="LiveId" clId="{A16DFF17-4FF3-4109-A435-57F25017F4B7}" dt="2026-07-10T05:49:55.609" v="992" actId="208"/>
-          <ac:spMkLst>
-            <pc:docMk/>
-            <pc:sldMk cId="0" sldId="2147482901"/>
-            <ac:spMk id="50" creationId="{00000000-0000-0000-0000-000000000000}"/>
-          </ac:spMkLst>
-        </pc:spChg>
-        <pc:spChg chg="mod">
-          <ac:chgData name="文浩 郭" userId="6ccc17ab3add3069" providerId="LiveId" clId="{A16DFF17-4FF3-4109-A435-57F25017F4B7}" dt="2026-07-10T05:50:04.047" v="995" actId="403"/>
-          <ac:spMkLst>
-            <pc:docMk/>
-            <pc:sldMk cId="0" sldId="2147482901"/>
-            <ac:spMk id="51" creationId="{00000000-0000-0000-0000-000000000000}"/>
-          </ac:spMkLst>
-        </pc:spChg>
-        <pc:spChg chg="mod">
-          <ac:chgData name="文浩 郭" userId="6ccc17ab3add3069" providerId="LiveId" clId="{A16DFF17-4FF3-4109-A435-57F25017F4B7}" dt="2026-07-10T05:49:02.939" v="981" actId="208"/>
-          <ac:spMkLst>
-            <pc:docMk/>
-            <pc:sldMk cId="0" sldId="2147482901"/>
-            <ac:spMk id="53" creationId="{00000000-0000-0000-0000-000000000000}"/>
-          </ac:spMkLst>
-        </pc:spChg>
-        <pc:spChg chg="mod">
-          <ac:chgData name="文浩 郭" userId="6ccc17ab3add3069" providerId="LiveId" clId="{A16DFF17-4FF3-4109-A435-57F25017F4B7}" dt="2026-07-10T05:50:04.047" v="995" actId="403"/>
-          <ac:spMkLst>
-            <pc:docMk/>
-            <pc:sldMk cId="0" sldId="2147482901"/>
-            <ac:spMk id="54" creationId="{00000000-0000-0000-0000-000000000000}"/>
-          </ac:spMkLst>
-        </pc:spChg>
-      </pc:sldChg>
-      <pc:sldChg chg="modSp del mod">
-        <pc:chgData name="文浩 郭" userId="6ccc17ab3add3069" providerId="LiveId" clId="{A16DFF17-4FF3-4109-A435-57F25017F4B7}" dt="2026-07-10T08:18:53.017" v="1238" actId="47"/>
-        <pc:sldMkLst>
-          <pc:docMk/>
-          <pc:sldMk cId="0" sldId="2147482903"/>
-        </pc:sldMkLst>
-        <pc:spChg chg="mod">
-          <ac:chgData name="文浩 郭" userId="6ccc17ab3add3069" providerId="LiveId" clId="{A16DFF17-4FF3-4109-A435-57F25017F4B7}" dt="2026-07-10T06:58:53.678" v="1020" actId="20577"/>
-          <ac:spMkLst>
-            <pc:docMk/>
-            <pc:sldMk cId="0" sldId="2147482903"/>
-            <ac:spMk id="69" creationId="{00000000-0000-0000-0000-000000000000}"/>
-          </ac:spMkLst>
-        </pc:spChg>
-      </pc:sldChg>
-      <pc:sldChg chg="del">
-        <pc:chgData name="文浩 郭" userId="6ccc17ab3add3069" providerId="LiveId" clId="{A16DFF17-4FF3-4109-A435-57F25017F4B7}" dt="2026-07-10T08:19:14.762" v="1240" actId="47"/>
-        <pc:sldMkLst>
-          <pc:docMk/>
-          <pc:sldMk cId="0" sldId="2147482904"/>
-        </pc:sldMkLst>
-      </pc:sldChg>
       <pc:sldChg chg="modSp mod">
         <pc:chgData name="文浩 郭" userId="6ccc17ab3add3069" providerId="LiveId" clId="{A16DFF17-4FF3-4109-A435-57F25017F4B7}" dt="2026-07-10T06:20:45.649" v="996" actId="1035"/>
         <pc:sldMkLst>
           <pc:docMk/>
           <pc:sldMk cId="0" sldId="2147482905"/>
         </pc:sldMkLst>
-        <pc:picChg chg="mod">
-          <ac:chgData name="文浩 郭" userId="6ccc17ab3add3069" providerId="LiveId" clId="{A16DFF17-4FF3-4109-A435-57F25017F4B7}" dt="2026-07-10T06:20:45.649" v="996" actId="1035"/>
-          <ac:picMkLst>
-            <pc:docMk/>
-            <pc:sldMk cId="0" sldId="2147482905"/>
-            <ac:picMk id="95" creationId="{00000000-0000-0000-0000-000000000000}"/>
-          </ac:picMkLst>
-        </pc:picChg>
       </pc:sldChg>
       <pc:sldChg chg="addSp delSp modSp add mod">
         <pc:chgData name="文浩 郭" userId="6ccc17ab3add3069" providerId="LiveId" clId="{A16DFF17-4FF3-4109-A435-57F25017F4B7}" dt="2026-07-10T08:21:57.770" v="1321" actId="478"/>
@@ -514,14 +351,6 @@
             <ac:spMk id="55" creationId="{00000000-0000-0000-0000-000000000000}"/>
           </ac:spMkLst>
         </pc:spChg>
-        <pc:picChg chg="add del">
-          <ac:chgData name="文浩 郭" userId="6ccc17ab3add3069" providerId="LiveId" clId="{A16DFF17-4FF3-4109-A435-57F25017F4B7}" dt="2026-07-10T08:21:57.770" v="1321" actId="478"/>
-          <ac:picMkLst>
-            <pc:docMk/>
-            <pc:sldMk cId="0" sldId="2147482906"/>
-            <ac:picMk id="3" creationId="{721CD059-9CD7-3348-9335-9FCA435D4F47}"/>
-          </ac:picMkLst>
-        </pc:picChg>
       </pc:sldChg>
       <pc:sldChg chg="addSp delSp modSp add mod">
         <pc:chgData name="文浩 郭" userId="6ccc17ab3add3069" providerId="LiveId" clId="{A16DFF17-4FF3-4109-A435-57F25017F4B7}" dt="2026-07-10T08:21:21.502" v="1315" actId="21"/>
@@ -545,14 +374,6 @@
             <ac:spMk id="7" creationId="{7C1EAB8D-5060-CFF2-DC40-CC447D8CA772}"/>
           </ac:spMkLst>
         </pc:spChg>
-        <pc:picChg chg="add del mod">
-          <ac:chgData name="文浩 郭" userId="6ccc17ab3add3069" providerId="LiveId" clId="{A16DFF17-4FF3-4109-A435-57F25017F4B7}" dt="2026-07-10T08:21:21.502" v="1315" actId="21"/>
-          <ac:picMkLst>
-            <pc:docMk/>
-            <pc:sldMk cId="0" sldId="2147482907"/>
-            <ac:picMk id="3" creationId="{4579A466-9F69-5C81-0250-EA6BE3A0BB08}"/>
-          </ac:picMkLst>
-        </pc:picChg>
       </pc:sldChg>
       <pc:sldChg chg="modSp add mod">
         <pc:chgData name="文浩 郭" userId="6ccc17ab3add3069" providerId="LiveId" clId="{A16DFF17-4FF3-4109-A435-57F25017F4B7}" dt="2026-07-10T08:23:34.541" v="1356" actId="20577"/>
@@ -573,8 +394,8 @@
   </pc:docChgLst>
   <pc:docChgLst>
     <pc:chgData name="郭文浩-數位經營部-永豐金證券" userId="274e1ecc-273d-4e1f-a4ac-0f2f0565666d" providerId="ADAL" clId="{40D049B3-D0A6-43DB-8827-ED15BABCAA6A}"/>
-    <pc:docChg chg="custSel modSld">
-      <pc:chgData name="郭文浩-數位經營部-永豐金證券" userId="274e1ecc-273d-4e1f-a4ac-0f2f0565666d" providerId="ADAL" clId="{40D049B3-D0A6-43DB-8827-ED15BABCAA6A}" dt="2026-07-09T09:31:34.404" v="5" actId="478"/>
+    <pc:docChg chg="undo custSel addSld modSld sldOrd">
+      <pc:chgData name="郭文浩-數位經營部-永豐金證券" userId="274e1ecc-273d-4e1f-a4ac-0f2f0565666d" providerId="ADAL" clId="{40D049B3-D0A6-43DB-8827-ED15BABCAA6A}" dt="2026-07-13T12:03:36.436" v="415" actId="1076"/>
       <pc:docMkLst>
         <pc:docMk/>
       </pc:docMkLst>
@@ -584,20 +405,238 @@
           <pc:docMk/>
           <pc:sldMk cId="0" sldId="261"/>
         </pc:sldMkLst>
-        <pc:picChg chg="del">
-          <ac:chgData name="郭文浩-數位經營部-永豐金證券" userId="274e1ecc-273d-4e1f-a4ac-0f2f0565666d" providerId="ADAL" clId="{40D049B3-D0A6-43DB-8827-ED15BABCAA6A}" dt="2026-07-09T09:29:59.440" v="0" actId="478"/>
+      </pc:sldChg>
+      <pc:sldChg chg="modSp mod">
+        <pc:chgData name="郭文浩-數位經營部-永豐金證券" userId="274e1ecc-273d-4e1f-a4ac-0f2f0565666d" providerId="ADAL" clId="{40D049B3-D0A6-43DB-8827-ED15BABCAA6A}" dt="2026-07-13T11:02:16.336" v="44" actId="20577"/>
+        <pc:sldMkLst>
+          <pc:docMk/>
+          <pc:sldMk cId="0" sldId="2147482900"/>
+        </pc:sldMkLst>
+        <pc:spChg chg="mod">
+          <ac:chgData name="郭文浩-數位經營部-永豐金證券" userId="274e1ecc-273d-4e1f-a4ac-0f2f0565666d" providerId="ADAL" clId="{40D049B3-D0A6-43DB-8827-ED15BABCAA6A}" dt="2026-07-13T11:02:16.336" v="44" actId="20577"/>
+          <ac:spMkLst>
+            <pc:docMk/>
+            <pc:sldMk cId="0" sldId="2147482900"/>
+            <ac:spMk id="4" creationId="{361EB62E-984A-3DF3-8A3D-65088788322C}"/>
+          </ac:spMkLst>
+        </pc:spChg>
+      </pc:sldChg>
+      <pc:sldChg chg="addSp delSp modSp mod">
+        <pc:chgData name="郭文浩-數位經營部-永豐金證券" userId="274e1ecc-273d-4e1f-a4ac-0f2f0565666d" providerId="ADAL" clId="{40D049B3-D0A6-43DB-8827-ED15BABCAA6A}" dt="2026-07-13T12:03:36.436" v="415" actId="1076"/>
+        <pc:sldMkLst>
+          <pc:docMk/>
+          <pc:sldMk cId="0" sldId="2147482905"/>
+        </pc:sldMkLst>
+        <pc:spChg chg="del">
+          <ac:chgData name="郭文浩-數位經營部-永豐金證券" userId="274e1ecc-273d-4e1f-a4ac-0f2f0565666d" providerId="ADAL" clId="{40D049B3-D0A6-43DB-8827-ED15BABCAA6A}" dt="2026-07-13T11:04:51.116" v="162" actId="478"/>
+          <ac:spMkLst>
+            <pc:docMk/>
+            <pc:sldMk cId="0" sldId="2147482905"/>
+            <ac:spMk id="94" creationId="{00000000-0000-0000-0000-000000000000}"/>
+          </ac:spMkLst>
+        </pc:spChg>
+        <pc:spChg chg="del">
+          <ac:chgData name="郭文浩-數位經營部-永豐金證券" userId="274e1ecc-273d-4e1f-a4ac-0f2f0565666d" providerId="ADAL" clId="{40D049B3-D0A6-43DB-8827-ED15BABCAA6A}" dt="2026-07-13T11:04:50.492" v="161" actId="478"/>
+          <ac:spMkLst>
+            <pc:docMk/>
+            <pc:sldMk cId="0" sldId="2147482905"/>
+            <ac:spMk id="96" creationId="{00000000-0000-0000-0000-000000000000}"/>
+          </ac:spMkLst>
+        </pc:spChg>
+        <pc:picChg chg="add del mod">
+          <ac:chgData name="郭文浩-數位經營部-永豐金證券" userId="274e1ecc-273d-4e1f-a4ac-0f2f0565666d" providerId="ADAL" clId="{40D049B3-D0A6-43DB-8827-ED15BABCAA6A}" dt="2026-07-13T11:06:14.907" v="169" actId="478"/>
           <ac:picMkLst>
             <pc:docMk/>
-            <pc:sldMk cId="0" sldId="261"/>
-            <ac:picMk id="7" creationId="{B3831D22-A1CF-4098-F2EC-EFCBA42BC858}"/>
+            <pc:sldMk cId="0" sldId="2147482905"/>
+            <ac:picMk id="3" creationId="{B4EF0D5F-9339-D5D9-21BC-06E29F716167}"/>
+          </ac:picMkLst>
+        </pc:picChg>
+        <pc:picChg chg="add mod">
+          <ac:chgData name="郭文浩-數位經營部-永豐金證券" userId="274e1ecc-273d-4e1f-a4ac-0f2f0565666d" providerId="ADAL" clId="{40D049B3-D0A6-43DB-8827-ED15BABCAA6A}" dt="2026-07-13T12:03:31.929" v="414" actId="14100"/>
+          <ac:picMkLst>
+            <pc:docMk/>
+            <pc:sldMk cId="0" sldId="2147482905"/>
+            <ac:picMk id="3" creationId="{CC3ED541-2E27-C977-1CD7-9BA2718C180A}"/>
+          </ac:picMkLst>
+        </pc:picChg>
+        <pc:picChg chg="add mod">
+          <ac:chgData name="郭文浩-數位經營部-永豐金證券" userId="274e1ecc-273d-4e1f-a4ac-0f2f0565666d" providerId="ADAL" clId="{40D049B3-D0A6-43DB-8827-ED15BABCAA6A}" dt="2026-07-13T12:03:36.436" v="415" actId="1076"/>
+          <ac:picMkLst>
+            <pc:docMk/>
+            <pc:sldMk cId="0" sldId="2147482905"/>
+            <ac:picMk id="5" creationId="{AF0A650C-C2DB-D66F-113F-09761814837D}"/>
+          </ac:picMkLst>
+        </pc:picChg>
+        <pc:picChg chg="del">
+          <ac:chgData name="郭文浩-數位經營部-永豐金證券" userId="274e1ecc-273d-4e1f-a4ac-0f2f0565666d" providerId="ADAL" clId="{40D049B3-D0A6-43DB-8827-ED15BABCAA6A}" dt="2026-07-13T11:04:49.239" v="160" actId="478"/>
+          <ac:picMkLst>
+            <pc:docMk/>
+            <pc:sldMk cId="0" sldId="2147482905"/>
+            <ac:picMk id="95" creationId="{00000000-0000-0000-0000-000000000000}"/>
+          </ac:picMkLst>
+        </pc:picChg>
+      </pc:sldChg>
+      <pc:sldChg chg="modSp mod">
+        <pc:chgData name="郭文浩-數位經營部-永豐金證券" userId="274e1ecc-273d-4e1f-a4ac-0f2f0565666d" providerId="ADAL" clId="{40D049B3-D0A6-43DB-8827-ED15BABCAA6A}" dt="2026-07-13T11:02:39.817" v="74" actId="20577"/>
+        <pc:sldMkLst>
+          <pc:docMk/>
+          <pc:sldMk cId="0" sldId="2147482907"/>
+        </pc:sldMkLst>
+        <pc:spChg chg="mod">
+          <ac:chgData name="郭文浩-數位經營部-永豐金證券" userId="274e1ecc-273d-4e1f-a4ac-0f2f0565666d" providerId="ADAL" clId="{40D049B3-D0A6-43DB-8827-ED15BABCAA6A}" dt="2026-07-13T11:02:39.817" v="74" actId="20577"/>
+          <ac:spMkLst>
+            <pc:docMk/>
+            <pc:sldMk cId="0" sldId="2147482907"/>
+            <ac:spMk id="7" creationId="{7C1EAB8D-5060-CFF2-DC40-CC447D8CA772}"/>
+          </ac:spMkLst>
+        </pc:spChg>
+      </pc:sldChg>
+      <pc:sldChg chg="addSp modSp mod">
+        <pc:chgData name="郭文浩-數位經營部-永豐金證券" userId="274e1ecc-273d-4e1f-a4ac-0f2f0565666d" providerId="ADAL" clId="{40D049B3-D0A6-43DB-8827-ED15BABCAA6A}" dt="2026-07-13T11:58:28.250" v="330" actId="552"/>
+        <pc:sldMkLst>
+          <pc:docMk/>
+          <pc:sldMk cId="0" sldId="2147482908"/>
+        </pc:sldMkLst>
+        <pc:spChg chg="mod">
+          <ac:chgData name="郭文浩-數位經營部-永豐金證券" userId="274e1ecc-273d-4e1f-a4ac-0f2f0565666d" providerId="ADAL" clId="{40D049B3-D0A6-43DB-8827-ED15BABCAA6A}" dt="2026-07-13T11:03:48.019" v="114" actId="20577"/>
+          <ac:spMkLst>
+            <pc:docMk/>
+            <pc:sldMk cId="0" sldId="2147482908"/>
+            <ac:spMk id="3" creationId="{C61512A1-1763-8480-3EA1-20EDCC258513}"/>
+          </ac:spMkLst>
+        </pc:spChg>
+        <pc:spChg chg="add mod">
+          <ac:chgData name="郭文浩-數位經營部-永豐金證券" userId="274e1ecc-273d-4e1f-a4ac-0f2f0565666d" providerId="ADAL" clId="{40D049B3-D0A6-43DB-8827-ED15BABCAA6A}" dt="2026-07-13T11:58:28.250" v="330" actId="552"/>
+          <ac:spMkLst>
+            <pc:docMk/>
+            <pc:sldMk cId="0" sldId="2147482908"/>
+            <ac:spMk id="4" creationId="{EAF509D0-1A72-8D6E-B0E5-2BC3A2E3A46A}"/>
+          </ac:spMkLst>
+        </pc:spChg>
+        <pc:spChg chg="mod">
+          <ac:chgData name="郭文浩-數位經營部-永豐金證券" userId="274e1ecc-273d-4e1f-a4ac-0f2f0565666d" providerId="ADAL" clId="{40D049B3-D0A6-43DB-8827-ED15BABCAA6A}" dt="2026-07-13T11:58:28.250" v="330" actId="552"/>
+          <ac:spMkLst>
+            <pc:docMk/>
+            <pc:sldMk cId="0" sldId="2147482908"/>
+            <ac:spMk id="85" creationId="{00000000-0000-0000-0000-000000000000}"/>
+          </ac:spMkLst>
+        </pc:spChg>
+        <pc:spChg chg="mod">
+          <ac:chgData name="郭文浩-數位經營部-永豐金證券" userId="274e1ecc-273d-4e1f-a4ac-0f2f0565666d" providerId="ADAL" clId="{40D049B3-D0A6-43DB-8827-ED15BABCAA6A}" dt="2026-07-13T11:58:13.373" v="321" actId="14100"/>
+          <ac:spMkLst>
+            <pc:docMk/>
+            <pc:sldMk cId="0" sldId="2147482908"/>
+            <ac:spMk id="86" creationId="{00000000-0000-0000-0000-000000000000}"/>
+          </ac:spMkLst>
+        </pc:spChg>
+        <pc:graphicFrameChg chg="modGraphic">
+          <ac:chgData name="郭文浩-數位經營部-永豐金證券" userId="274e1ecc-273d-4e1f-a4ac-0f2f0565666d" providerId="ADAL" clId="{40D049B3-D0A6-43DB-8827-ED15BABCAA6A}" dt="2026-07-13T11:58:01.522" v="317" actId="108"/>
+          <ac:graphicFrameMkLst>
+            <pc:docMk/>
+            <pc:sldMk cId="0" sldId="2147482908"/>
+            <ac:graphicFrameMk id="2" creationId="{3E0355A8-9D93-E87D-80AD-AF4B413A3B53}"/>
+          </ac:graphicFrameMkLst>
+        </pc:graphicFrameChg>
+      </pc:sldChg>
+      <pc:sldChg chg="addSp delSp modSp add mod">
+        <pc:chgData name="郭文浩-數位經營部-永豐金證券" userId="274e1ecc-273d-4e1f-a4ac-0f2f0565666d" providerId="ADAL" clId="{40D049B3-D0A6-43DB-8827-ED15BABCAA6A}" dt="2026-07-13T12:02:13.474" v="408" actId="20577"/>
+        <pc:sldMkLst>
+          <pc:docMk/>
+          <pc:sldMk cId="1440746775" sldId="2147482909"/>
+        </pc:sldMkLst>
+        <pc:spChg chg="add mod">
+          <ac:chgData name="郭文浩-數位經營部-永豐金證券" userId="274e1ecc-273d-4e1f-a4ac-0f2f0565666d" providerId="ADAL" clId="{40D049B3-D0A6-43DB-8827-ED15BABCAA6A}" dt="2026-07-13T12:02:13.474" v="408" actId="20577"/>
+          <ac:spMkLst>
+            <pc:docMk/>
+            <pc:sldMk cId="1440746775" sldId="2147482909"/>
+            <ac:spMk id="9" creationId="{FE3D0460-0B8D-16F7-D11A-09870669471B}"/>
+          </ac:spMkLst>
+        </pc:spChg>
+        <pc:picChg chg="del">
+          <ac:chgData name="郭文浩-數位經營部-永豐金證券" userId="274e1ecc-273d-4e1f-a4ac-0f2f0565666d" providerId="ADAL" clId="{40D049B3-D0A6-43DB-8827-ED15BABCAA6A}" dt="2026-07-13T11:25:49.830" v="176" actId="478"/>
+          <ac:picMkLst>
+            <pc:docMk/>
+            <pc:sldMk cId="1440746775" sldId="2147482909"/>
+            <ac:picMk id="3" creationId="{CE2BA18F-4FCE-294A-5786-F314AF1D1F7A}"/>
           </ac:picMkLst>
         </pc:picChg>
         <pc:picChg chg="add del mod">
-          <ac:chgData name="郭文浩-數位經營部-永豐金證券" userId="274e1ecc-273d-4e1f-a4ac-0f2f0565666d" providerId="ADAL" clId="{40D049B3-D0A6-43DB-8827-ED15BABCAA6A}" dt="2026-07-09T09:31:34.404" v="5" actId="478"/>
+          <ac:chgData name="郭文浩-數位經營部-永豐金證券" userId="274e1ecc-273d-4e1f-a4ac-0f2f0565666d" providerId="ADAL" clId="{40D049B3-D0A6-43DB-8827-ED15BABCAA6A}" dt="2026-07-13T11:55:35.114" v="191" actId="478"/>
           <ac:picMkLst>
             <pc:docMk/>
-            <pc:sldMk cId="0" sldId="261"/>
-            <ac:picMk id="9" creationId="{0044546F-AB75-7120-8DD8-C099F6B13DA6}"/>
+            <pc:sldMk cId="1440746775" sldId="2147482909"/>
+            <ac:picMk id="4" creationId="{320C3681-8BFE-99D9-F7A4-87E4BFDB913E}"/>
+          </ac:picMkLst>
+        </pc:picChg>
+        <pc:picChg chg="add del mod">
+          <ac:chgData name="郭文浩-數位經營部-永豐金證券" userId="274e1ecc-273d-4e1f-a4ac-0f2f0565666d" providerId="ADAL" clId="{40D049B3-D0A6-43DB-8827-ED15BABCAA6A}" dt="2026-07-13T11:55:34.827" v="190" actId="931"/>
+          <ac:picMkLst>
+            <pc:docMk/>
+            <pc:sldMk cId="1440746775" sldId="2147482909"/>
+            <ac:picMk id="6" creationId="{D37F4E5E-DDBA-CF29-4775-CC693F0328AF}"/>
+          </ac:picMkLst>
+        </pc:picChg>
+        <pc:picChg chg="add del mod">
+          <ac:chgData name="郭文浩-數位經營部-永豐金證券" userId="274e1ecc-273d-4e1f-a4ac-0f2f0565666d" providerId="ADAL" clId="{40D049B3-D0A6-43DB-8827-ED15BABCAA6A}" dt="2026-07-13T11:57:21.473" v="260" actId="478"/>
+          <ac:picMkLst>
+            <pc:docMk/>
+            <pc:sldMk cId="1440746775" sldId="2147482909"/>
+            <ac:picMk id="8" creationId="{5ABF70A5-41C1-4EB4-D06D-F1BE5EA77821}"/>
+          </ac:picMkLst>
+        </pc:picChg>
+      </pc:sldChg>
+      <pc:sldChg chg="addSp delSp modSp add mod ord">
+        <pc:chgData name="郭文浩-數位經營部-永豐金證券" userId="274e1ecc-273d-4e1f-a4ac-0f2f0565666d" providerId="ADAL" clId="{40D049B3-D0A6-43DB-8827-ED15BABCAA6A}" dt="2026-07-13T12:01:52.920" v="375"/>
+        <pc:sldMkLst>
+          <pc:docMk/>
+          <pc:sldMk cId="1849772947" sldId="2147482910"/>
+        </pc:sldMkLst>
+        <pc:spChg chg="add del mod">
+          <ac:chgData name="郭文浩-數位經營部-永豐金證券" userId="274e1ecc-273d-4e1f-a4ac-0f2f0565666d" providerId="ADAL" clId="{40D049B3-D0A6-43DB-8827-ED15BABCAA6A}" dt="2026-07-13T11:56:39.985" v="209" actId="478"/>
+          <ac:spMkLst>
+            <pc:docMk/>
+            <pc:sldMk cId="1849772947" sldId="2147482910"/>
+            <ac:spMk id="5" creationId="{4ECDCDE1-E5ED-CB4F-9951-3587804EDFBF}"/>
+          </ac:spMkLst>
+        </pc:spChg>
+        <pc:spChg chg="add mod">
+          <ac:chgData name="郭文浩-數位經營部-永豐金證券" userId="274e1ecc-273d-4e1f-a4ac-0f2f0565666d" providerId="ADAL" clId="{40D049B3-D0A6-43DB-8827-ED15BABCAA6A}" dt="2026-07-13T11:57:16.831" v="259" actId="14100"/>
+          <ac:spMkLst>
+            <pc:docMk/>
+            <pc:sldMk cId="1849772947" sldId="2147482910"/>
+            <ac:spMk id="6" creationId="{F8645C62-CA39-E07B-A96E-556977C0016F}"/>
+          </ac:spMkLst>
+        </pc:spChg>
+        <pc:spChg chg="add mod">
+          <ac:chgData name="郭文浩-數位經營部-永豐金證券" userId="274e1ecc-273d-4e1f-a4ac-0f2f0565666d" providerId="ADAL" clId="{40D049B3-D0A6-43DB-8827-ED15BABCAA6A}" dt="2026-07-13T11:58:59.132" v="373" actId="1076"/>
+          <ac:spMkLst>
+            <pc:docMk/>
+            <pc:sldMk cId="1849772947" sldId="2147482910"/>
+            <ac:spMk id="7" creationId="{77469066-6609-F7A7-7E85-48BEC75E6D2F}"/>
+          </ac:spMkLst>
+        </pc:spChg>
+        <pc:picChg chg="add mod">
+          <ac:chgData name="郭文浩-數位經營部-永豐金證券" userId="274e1ecc-273d-4e1f-a4ac-0f2f0565666d" providerId="ADAL" clId="{40D049B3-D0A6-43DB-8827-ED15BABCAA6A}" dt="2026-07-13T11:56:27.879" v="206" actId="1440"/>
+          <ac:picMkLst>
+            <pc:docMk/>
+            <pc:sldMk cId="1849772947" sldId="2147482910"/>
+            <ac:picMk id="3" creationId="{79C1B7C2-DC26-9BB6-0AE7-8497B4D0D00A}"/>
+          </ac:picMkLst>
+        </pc:picChg>
+        <pc:picChg chg="del">
+          <ac:chgData name="郭文浩-數位經營部-永豐金證券" userId="274e1ecc-273d-4e1f-a4ac-0f2f0565666d" providerId="ADAL" clId="{40D049B3-D0A6-43DB-8827-ED15BABCAA6A}" dt="2026-07-13T11:55:40.381" v="195" actId="478"/>
+          <ac:picMkLst>
+            <pc:docMk/>
+            <pc:sldMk cId="1849772947" sldId="2147482910"/>
+            <ac:picMk id="4" creationId="{6FBAB921-7909-3178-00C6-3E2C7C6BBD15}"/>
+          </ac:picMkLst>
+        </pc:picChg>
+        <pc:picChg chg="mod">
+          <ac:chgData name="郭文浩-數位經營部-永豐金證券" userId="274e1ecc-273d-4e1f-a4ac-0f2f0565666d" providerId="ADAL" clId="{40D049B3-D0A6-43DB-8827-ED15BABCAA6A}" dt="2026-07-13T11:55:43.435" v="197" actId="1076"/>
+          <ac:picMkLst>
+            <pc:docMk/>
+            <pc:sldMk cId="1849772947" sldId="2147482910"/>
+            <ac:picMk id="8" creationId="{9F2A5DF1-8FFE-082E-EDF3-A97FE3F1BFA7}"/>
           </ac:picMkLst>
         </pc:picChg>
       </pc:sldChg>
@@ -688,7 +727,7 @@
           <a:p>
             <a:fld id="{602A1B36-CF89-4CE4-A8DF-FD84EF87482D}" type="datetimeFigureOut">
               <a:rPr lang="zh-TW" altLang="en-US" smtClean="0"/>
-              <a:t>2026/7/10</a:t>
+              <a:t>2026/7/13</a:t>
             </a:fld>
             <a:endParaRPr lang="zh-TW" altLang="en-US"/>
           </a:p>
@@ -2298,6 +2337,514 @@
         </p:txBody>
       </p:sp>
     </p:spTree>
+  </p:cSld>
+  <p:clrMapOvr>
+    <a:masterClrMapping/>
+  </p:clrMapOvr>
+</p:notes>
+</file>
+
+<file path=ppt/notesSlides/notesSlide7.xml><?xml version="1.0" encoding="utf-8"?>
+<p:notes xmlns:a="http://schemas.openxmlformats.org/drawingml/2006/main" xmlns:r="http://schemas.openxmlformats.org/officeDocument/2006/relationships" xmlns:p="http://schemas.openxmlformats.org/presentationml/2006/main" showMasterSp="0" showMasterPhAnim="0">
+  <p:cSld>
+    <p:spTree>
+      <p:nvGrpSpPr>
+        <p:cNvPr id="1" name="Shape 88">
+          <a:extLst>
+            <a:ext uri="{FF2B5EF4-FFF2-40B4-BE49-F238E27FC236}">
+              <a16:creationId xmlns:a16="http://schemas.microsoft.com/office/drawing/2014/main" id="{B67F8DE4-F627-9511-AEA7-744F9CA36EB9}"/>
+            </a:ext>
+          </a:extLst>
+        </p:cNvPr>
+        <p:cNvGrpSpPr/>
+        <p:nvPr/>
+      </p:nvGrpSpPr>
+      <p:grpSpPr>
+        <a:xfrm>
+          <a:off x="0" y="0"/>
+          <a:ext cx="0" cy="0"/>
+          <a:chOff x="0" y="0"/>
+          <a:chExt cx="0" cy="0"/>
+        </a:xfrm>
+      </p:grpSpPr>
+      <p:sp>
+        <p:nvSpPr>
+          <p:cNvPr id="89" name="Google Shape;89;p9:notes">
+            <a:extLst>
+              <a:ext uri="{FF2B5EF4-FFF2-40B4-BE49-F238E27FC236}">
+                <a16:creationId xmlns:a16="http://schemas.microsoft.com/office/drawing/2014/main" id="{7946EA13-8150-E25B-2C2C-C75570749571}"/>
+              </a:ext>
+            </a:extLst>
+          </p:cNvPr>
+          <p:cNvSpPr>
+            <a:spLocks noGrp="1" noRot="1" noChangeAspect="1"/>
+          </p:cNvSpPr>
+          <p:nvPr>
+            <p:ph type="sldImg" idx="2"/>
+          </p:nvPr>
+        </p:nvSpPr>
+        <p:spPr>
+          <a:xfrm>
+            <a:off x="422275" y="1241425"/>
+            <a:ext cx="5953125" cy="3349625"/>
+          </a:xfrm>
+          <a:custGeom>
+            <a:avLst/>
+            <a:gdLst/>
+            <a:ahLst/>
+            <a:cxnLst/>
+            <a:rect l="l" t="t" r="r" b="b"/>
+            <a:pathLst>
+              <a:path w="120000" h="120000" extrusionOk="0">
+                <a:moveTo>
+                  <a:pt x="0" y="0"/>
+                </a:moveTo>
+                <a:lnTo>
+                  <a:pt x="120000" y="0"/>
+                </a:lnTo>
+                <a:lnTo>
+                  <a:pt x="120000" y="120000"/>
+                </a:lnTo>
+                <a:lnTo>
+                  <a:pt x="0" y="120000"/>
+                </a:lnTo>
+                <a:close/>
+              </a:path>
+            </a:pathLst>
+          </a:custGeom>
+          <a:noFill/>
+          <a:ln w="12700" cap="flat" cmpd="sng">
+            <a:solidFill>
+              <a:srgbClr val="000000"/>
+            </a:solidFill>
+            <a:prstDash val="solid"/>
+            <a:round/>
+            <a:headEnd type="none" w="sm" len="sm"/>
+            <a:tailEnd type="none" w="sm" len="sm"/>
+          </a:ln>
+        </p:spPr>
+      </p:sp>
+      <p:sp>
+        <p:nvSpPr>
+          <p:cNvPr id="90" name="Google Shape;90;p9:notes">
+            <a:extLst>
+              <a:ext uri="{FF2B5EF4-FFF2-40B4-BE49-F238E27FC236}">
+                <a16:creationId xmlns:a16="http://schemas.microsoft.com/office/drawing/2014/main" id="{ECB94B91-5FD3-5CEC-A1E0-0AE304E34D28}"/>
+              </a:ext>
+            </a:extLst>
+          </p:cNvPr>
+          <p:cNvSpPr txBox="1">
+            <a:spLocks noGrp="1"/>
+          </p:cNvSpPr>
+          <p:nvPr>
+            <p:ph type="body" idx="1"/>
+          </p:nvPr>
+        </p:nvSpPr>
+        <p:spPr>
+          <a:xfrm>
+            <a:off x="679768" y="4777194"/>
+            <a:ext cx="5438140" cy="3908614"/>
+          </a:xfrm>
+          <a:prstGeom prst="rect">
+            <a:avLst/>
+          </a:prstGeom>
+          <a:noFill/>
+          <a:ln>
+            <a:noFill/>
+          </a:ln>
+        </p:spPr>
+        <p:txBody>
+          <a:bodyPr spcFirstLastPara="1" wrap="square" lIns="91425" tIns="45700" rIns="91425" bIns="45700" anchor="t" anchorCtr="0">
+            <a:noAutofit/>
+          </a:bodyPr>
+          <a:lstStyle/>
+          <a:p>
+            <a:pPr marL="457200" marR="0" lvl="0" indent="-228600" algn="l" rtl="0">
+              <a:lnSpc>
+                <a:spcPct val="100000"/>
+              </a:lnSpc>
+              <a:spcBef>
+                <a:spcPts val="0"/>
+              </a:spcBef>
+              <a:spcAft>
+                <a:spcPts val="0"/>
+              </a:spcAft>
+              <a:buSzPts val="1400"/>
+              <a:buNone/>
+            </a:pPr>
+            <a:endParaRPr/>
+          </a:p>
+        </p:txBody>
+      </p:sp>
+      <p:sp>
+        <p:nvSpPr>
+          <p:cNvPr id="91" name="Google Shape;91;p9:notes">
+            <a:extLst>
+              <a:ext uri="{FF2B5EF4-FFF2-40B4-BE49-F238E27FC236}">
+                <a16:creationId xmlns:a16="http://schemas.microsoft.com/office/drawing/2014/main" id="{D52A31AC-E0CC-66DF-5590-6678096C4C30}"/>
+              </a:ext>
+            </a:extLst>
+          </p:cNvPr>
+          <p:cNvSpPr txBox="1">
+            <a:spLocks noGrp="1"/>
+          </p:cNvSpPr>
+          <p:nvPr>
+            <p:ph type="sldNum" idx="12"/>
+          </p:nvPr>
+        </p:nvSpPr>
+        <p:spPr>
+          <a:xfrm>
+            <a:off x="3850443" y="9428584"/>
+            <a:ext cx="2945659" cy="498055"/>
+          </a:xfrm>
+          <a:prstGeom prst="rect">
+            <a:avLst/>
+          </a:prstGeom>
+          <a:noFill/>
+          <a:ln>
+            <a:noFill/>
+          </a:ln>
+        </p:spPr>
+        <p:txBody>
+          <a:bodyPr spcFirstLastPara="1" wrap="square" lIns="91425" tIns="45700" rIns="91425" bIns="45700" anchor="b" anchorCtr="0">
+            <a:noAutofit/>
+          </a:bodyPr>
+          <a:lstStyle/>
+          <a:p>
+            <a:pPr marL="0" marR="0" lvl="0" indent="0" algn="r" defTabSz="914400" rtl="0" eaLnBrk="1" fontAlgn="auto" latinLnBrk="0" hangingPunct="1">
+              <a:lnSpc>
+                <a:spcPct val="100000"/>
+              </a:lnSpc>
+              <a:spcBef>
+                <a:spcPts val="0"/>
+              </a:spcBef>
+              <a:spcAft>
+                <a:spcPts val="0"/>
+              </a:spcAft>
+              <a:buClr>
+                <a:srgbClr val="000000"/>
+              </a:buClr>
+              <a:buSzPts val="1200"/>
+              <a:buFont typeface="Arial"/>
+              <a:buNone/>
+              <a:tabLst/>
+              <a:defRPr/>
+            </a:pPr>
+            <a:fld id="{00000000-1234-1234-1234-123412341234}" type="slidenum">
+              <a:rPr kumimoji="0" lang="en-US" altLang="zh-TW" sz="1200" b="0" i="0" u="none" strike="noStrike" kern="0" cap="none" spc="0" normalizeH="0" baseline="0" noProof="0">
+                <a:ln>
+                  <a:noFill/>
+                </a:ln>
+                <a:solidFill>
+                  <a:srgbClr val="000000"/>
+                </a:solidFill>
+                <a:effectLst/>
+                <a:uLnTx/>
+                <a:uFillTx/>
+                <a:latin typeface="Calibri"/>
+                <a:ea typeface="Calibri"/>
+                <a:cs typeface="Calibri"/>
+                <a:sym typeface="Calibri"/>
+              </a:rPr>
+              <a:pPr marL="0" marR="0" lvl="0" indent="0" algn="r" defTabSz="914400" rtl="0" eaLnBrk="1" fontAlgn="auto" latinLnBrk="0" hangingPunct="1">
+                <a:lnSpc>
+                  <a:spcPct val="100000"/>
+                </a:lnSpc>
+                <a:spcBef>
+                  <a:spcPts val="0"/>
+                </a:spcBef>
+                <a:spcAft>
+                  <a:spcPts val="0"/>
+                </a:spcAft>
+                <a:buClr>
+                  <a:srgbClr val="000000"/>
+                </a:buClr>
+                <a:buSzPts val="1200"/>
+                <a:buFont typeface="Arial"/>
+                <a:buNone/>
+                <a:tabLst/>
+                <a:defRPr/>
+              </a:pPr>
+              <a:t>8</a:t>
+            </a:fld>
+            <a:endParaRPr kumimoji="0" sz="1200" b="0" i="0" u="none" strike="noStrike" kern="0" cap="none" spc="0" normalizeH="0" baseline="0" noProof="0">
+              <a:ln>
+                <a:noFill/>
+              </a:ln>
+              <a:solidFill>
+                <a:srgbClr val="000000"/>
+              </a:solidFill>
+              <a:effectLst/>
+              <a:uLnTx/>
+              <a:uFillTx/>
+              <a:latin typeface="Calibri"/>
+              <a:ea typeface="Calibri"/>
+              <a:cs typeface="Calibri"/>
+              <a:sym typeface="Calibri"/>
+            </a:endParaRPr>
+          </a:p>
+        </p:txBody>
+      </p:sp>
+    </p:spTree>
+    <p:extLst>
+      <p:ext uri="{BB962C8B-B14F-4D97-AF65-F5344CB8AC3E}">
+        <p14:creationId xmlns:p14="http://schemas.microsoft.com/office/powerpoint/2010/main" val="1104134237"/>
+      </p:ext>
+    </p:extLst>
+  </p:cSld>
+  <p:clrMapOvr>
+    <a:masterClrMapping/>
+  </p:clrMapOvr>
+</p:notes>
+</file>
+
+<file path=ppt/notesSlides/notesSlide8.xml><?xml version="1.0" encoding="utf-8"?>
+<p:notes xmlns:a="http://schemas.openxmlformats.org/drawingml/2006/main" xmlns:r="http://schemas.openxmlformats.org/officeDocument/2006/relationships" xmlns:p="http://schemas.openxmlformats.org/presentationml/2006/main" showMasterSp="0" showMasterPhAnim="0">
+  <p:cSld>
+    <p:spTree>
+      <p:nvGrpSpPr>
+        <p:cNvPr id="1" name="Shape 88">
+          <a:extLst>
+            <a:ext uri="{FF2B5EF4-FFF2-40B4-BE49-F238E27FC236}">
+              <a16:creationId xmlns:a16="http://schemas.microsoft.com/office/drawing/2014/main" id="{5187A7F9-C6C6-EFF7-45DF-A636D97A0847}"/>
+            </a:ext>
+          </a:extLst>
+        </p:cNvPr>
+        <p:cNvGrpSpPr/>
+        <p:nvPr/>
+      </p:nvGrpSpPr>
+      <p:grpSpPr>
+        <a:xfrm>
+          <a:off x="0" y="0"/>
+          <a:ext cx="0" cy="0"/>
+          <a:chOff x="0" y="0"/>
+          <a:chExt cx="0" cy="0"/>
+        </a:xfrm>
+      </p:grpSpPr>
+      <p:sp>
+        <p:nvSpPr>
+          <p:cNvPr id="89" name="Google Shape;89;p9:notes">
+            <a:extLst>
+              <a:ext uri="{FF2B5EF4-FFF2-40B4-BE49-F238E27FC236}">
+                <a16:creationId xmlns:a16="http://schemas.microsoft.com/office/drawing/2014/main" id="{0B31C3D8-9A8A-3AC4-08B0-3201D7CA0069}"/>
+              </a:ext>
+            </a:extLst>
+          </p:cNvPr>
+          <p:cNvSpPr>
+            <a:spLocks noGrp="1" noRot="1" noChangeAspect="1"/>
+          </p:cNvSpPr>
+          <p:nvPr>
+            <p:ph type="sldImg" idx="2"/>
+          </p:nvPr>
+        </p:nvSpPr>
+        <p:spPr>
+          <a:xfrm>
+            <a:off x="422275" y="1241425"/>
+            <a:ext cx="5953125" cy="3349625"/>
+          </a:xfrm>
+          <a:custGeom>
+            <a:avLst/>
+            <a:gdLst/>
+            <a:ahLst/>
+            <a:cxnLst/>
+            <a:rect l="l" t="t" r="r" b="b"/>
+            <a:pathLst>
+              <a:path w="120000" h="120000" extrusionOk="0">
+                <a:moveTo>
+                  <a:pt x="0" y="0"/>
+                </a:moveTo>
+                <a:lnTo>
+                  <a:pt x="120000" y="0"/>
+                </a:lnTo>
+                <a:lnTo>
+                  <a:pt x="120000" y="120000"/>
+                </a:lnTo>
+                <a:lnTo>
+                  <a:pt x="0" y="120000"/>
+                </a:lnTo>
+                <a:close/>
+              </a:path>
+            </a:pathLst>
+          </a:custGeom>
+          <a:noFill/>
+          <a:ln w="12700" cap="flat" cmpd="sng">
+            <a:solidFill>
+              <a:srgbClr val="000000"/>
+            </a:solidFill>
+            <a:prstDash val="solid"/>
+            <a:round/>
+            <a:headEnd type="none" w="sm" len="sm"/>
+            <a:tailEnd type="none" w="sm" len="sm"/>
+          </a:ln>
+        </p:spPr>
+      </p:sp>
+      <p:sp>
+        <p:nvSpPr>
+          <p:cNvPr id="90" name="Google Shape;90;p9:notes">
+            <a:extLst>
+              <a:ext uri="{FF2B5EF4-FFF2-40B4-BE49-F238E27FC236}">
+                <a16:creationId xmlns:a16="http://schemas.microsoft.com/office/drawing/2014/main" id="{66C3AD34-9A7A-BE37-C3F1-B06CA2EC764E}"/>
+              </a:ext>
+            </a:extLst>
+          </p:cNvPr>
+          <p:cNvSpPr txBox="1">
+            <a:spLocks noGrp="1"/>
+          </p:cNvSpPr>
+          <p:nvPr>
+            <p:ph type="body" idx="1"/>
+          </p:nvPr>
+        </p:nvSpPr>
+        <p:spPr>
+          <a:xfrm>
+            <a:off x="679768" y="4777194"/>
+            <a:ext cx="5438140" cy="3908614"/>
+          </a:xfrm>
+          <a:prstGeom prst="rect">
+            <a:avLst/>
+          </a:prstGeom>
+          <a:noFill/>
+          <a:ln>
+            <a:noFill/>
+          </a:ln>
+        </p:spPr>
+        <p:txBody>
+          <a:bodyPr spcFirstLastPara="1" wrap="square" lIns="91425" tIns="45700" rIns="91425" bIns="45700" anchor="t" anchorCtr="0">
+            <a:noAutofit/>
+          </a:bodyPr>
+          <a:lstStyle/>
+          <a:p>
+            <a:pPr marL="457200" marR="0" lvl="0" indent="-228600" algn="l" rtl="0">
+              <a:lnSpc>
+                <a:spcPct val="100000"/>
+              </a:lnSpc>
+              <a:spcBef>
+                <a:spcPts val="0"/>
+              </a:spcBef>
+              <a:spcAft>
+                <a:spcPts val="0"/>
+              </a:spcAft>
+              <a:buSzPts val="1400"/>
+              <a:buNone/>
+            </a:pPr>
+            <a:endParaRPr/>
+          </a:p>
+        </p:txBody>
+      </p:sp>
+      <p:sp>
+        <p:nvSpPr>
+          <p:cNvPr id="91" name="Google Shape;91;p9:notes">
+            <a:extLst>
+              <a:ext uri="{FF2B5EF4-FFF2-40B4-BE49-F238E27FC236}">
+                <a16:creationId xmlns:a16="http://schemas.microsoft.com/office/drawing/2014/main" id="{AE308935-8FF3-5989-F44C-2C290B130F24}"/>
+              </a:ext>
+            </a:extLst>
+          </p:cNvPr>
+          <p:cNvSpPr txBox="1">
+            <a:spLocks noGrp="1"/>
+          </p:cNvSpPr>
+          <p:nvPr>
+            <p:ph type="sldNum" idx="12"/>
+          </p:nvPr>
+        </p:nvSpPr>
+        <p:spPr>
+          <a:xfrm>
+            <a:off x="3850443" y="9428584"/>
+            <a:ext cx="2945659" cy="498055"/>
+          </a:xfrm>
+          <a:prstGeom prst="rect">
+            <a:avLst/>
+          </a:prstGeom>
+          <a:noFill/>
+          <a:ln>
+            <a:noFill/>
+          </a:ln>
+        </p:spPr>
+        <p:txBody>
+          <a:bodyPr spcFirstLastPara="1" wrap="square" lIns="91425" tIns="45700" rIns="91425" bIns="45700" anchor="b" anchorCtr="0">
+            <a:noAutofit/>
+          </a:bodyPr>
+          <a:lstStyle/>
+          <a:p>
+            <a:pPr marL="0" marR="0" lvl="0" indent="0" algn="r" defTabSz="914400" rtl="0" eaLnBrk="1" fontAlgn="auto" latinLnBrk="0" hangingPunct="1">
+              <a:lnSpc>
+                <a:spcPct val="100000"/>
+              </a:lnSpc>
+              <a:spcBef>
+                <a:spcPts val="0"/>
+              </a:spcBef>
+              <a:spcAft>
+                <a:spcPts val="0"/>
+              </a:spcAft>
+              <a:buClr>
+                <a:srgbClr val="000000"/>
+              </a:buClr>
+              <a:buSzPts val="1200"/>
+              <a:buFont typeface="Arial"/>
+              <a:buNone/>
+              <a:tabLst/>
+              <a:defRPr/>
+            </a:pPr>
+            <a:fld id="{00000000-1234-1234-1234-123412341234}" type="slidenum">
+              <a:rPr kumimoji="0" lang="en-US" altLang="zh-TW" sz="1200" b="0" i="0" u="none" strike="noStrike" kern="0" cap="none" spc="0" normalizeH="0" baseline="0" noProof="0">
+                <a:ln>
+                  <a:noFill/>
+                </a:ln>
+                <a:solidFill>
+                  <a:srgbClr val="000000"/>
+                </a:solidFill>
+                <a:effectLst/>
+                <a:uLnTx/>
+                <a:uFillTx/>
+                <a:latin typeface="Calibri"/>
+                <a:ea typeface="Calibri"/>
+                <a:cs typeface="Calibri"/>
+                <a:sym typeface="Calibri"/>
+              </a:rPr>
+              <a:pPr marL="0" marR="0" lvl="0" indent="0" algn="r" defTabSz="914400" rtl="0" eaLnBrk="1" fontAlgn="auto" latinLnBrk="0" hangingPunct="1">
+                <a:lnSpc>
+                  <a:spcPct val="100000"/>
+                </a:lnSpc>
+                <a:spcBef>
+                  <a:spcPts val="0"/>
+                </a:spcBef>
+                <a:spcAft>
+                  <a:spcPts val="0"/>
+                </a:spcAft>
+                <a:buClr>
+                  <a:srgbClr val="000000"/>
+                </a:buClr>
+                <a:buSzPts val="1200"/>
+                <a:buFont typeface="Arial"/>
+                <a:buNone/>
+                <a:tabLst/>
+                <a:defRPr/>
+              </a:pPr>
+              <a:t>9</a:t>
+            </a:fld>
+            <a:endParaRPr kumimoji="0" sz="1200" b="0" i="0" u="none" strike="noStrike" kern="0" cap="none" spc="0" normalizeH="0" baseline="0" noProof="0">
+              <a:ln>
+                <a:noFill/>
+              </a:ln>
+              <a:solidFill>
+                <a:srgbClr val="000000"/>
+              </a:solidFill>
+              <a:effectLst/>
+              <a:uLnTx/>
+              <a:uFillTx/>
+              <a:latin typeface="Calibri"/>
+              <a:ea typeface="Calibri"/>
+              <a:cs typeface="Calibri"/>
+              <a:sym typeface="Calibri"/>
+            </a:endParaRPr>
+          </a:p>
+        </p:txBody>
+      </p:sp>
+    </p:spTree>
+    <p:extLst>
+      <p:ext uri="{BB962C8B-B14F-4D97-AF65-F5344CB8AC3E}">
+        <p14:creationId xmlns:p14="http://schemas.microsoft.com/office/powerpoint/2010/main" val="153745123"/>
+      </p:ext>
+    </p:extLst>
   </p:cSld>
   <p:clrMapOvr>
     <a:masterClrMapping/>
@@ -7830,7 +8377,7 @@
                     <a:cs typeface="Microsoft JhengHei"/>
                     <a:sym typeface="Wingdings" panose="05000000000000000000" pitchFamily="2" charset="2"/>
                   </a:rPr>
-                  <a:t>將指派任育瑜時間內未完成，發派通知給專案成員</a:t>
+                  <a:t>未完成之任務，發派催件通知給專案成員</a:t>
                 </a:r>
                 <a:endParaRPr lang="zh-TW" altLang="en-US" sz="1400" b="1" dirty="0">
                   <a:latin typeface="微軟正黑體" panose="020B0604030504040204" pitchFamily="34" charset="-120"/>
@@ -12228,7 +12775,7 @@
                 <a:latin typeface="Microsoft YaHei" panose="020B0503020204020204" pitchFamily="34" charset="-122"/>
                 <a:ea typeface="Microsoft YaHei" panose="020B0503020204020204" pitchFamily="34" charset="-122"/>
               </a:rPr>
-              <a:t> 協作閉環</a:t>
+              <a:t> 協作工作流</a:t>
             </a:r>
           </a:p>
           <a:p>
@@ -13142,7 +13689,7 @@
         <p:spPr>
           <a:xfrm>
             <a:off x="365895" y="955131"/>
-            <a:ext cx="7693200" cy="307800"/>
+            <a:ext cx="7693200" cy="400069"/>
           </a:xfrm>
           <a:prstGeom prst="rect">
             <a:avLst/>
@@ -13178,103 +13725,21 @@
               <a:defRPr/>
             </a:pPr>
             <a:r>
-              <a:rPr kumimoji="0" lang="zh-TW" altLang="en-US" sz="1400" b="0" i="0" u="none" strike="noStrike" kern="1200" cap="none" spc="0" normalizeH="0" baseline="0" noProof="0">
-                <a:ln>
-                  <a:noFill/>
-                </a:ln>
-                <a:solidFill>
-                  <a:srgbClr val="000000"/>
-                </a:solidFill>
-                <a:effectLst/>
-                <a:uLnTx/>
-                <a:uFillTx/>
-                <a:latin typeface="Microsoft JhengHei" panose="020B0604030504040204" pitchFamily="34" charset="-120"/>
-                <a:ea typeface="Microsoft JhengHei" panose="020B0604030504040204" pitchFamily="34" charset="-120"/>
-                <a:cs typeface="+mn-cs"/>
-              </a:rPr>
-              <a:t>量化與質化效益（量化為四大 </a:t>
-            </a:r>
-            <a:r>
-              <a:rPr kumimoji="0" lang="en-US" altLang="zh-TW" sz="1400" b="0" i="0" u="none" strike="noStrike" kern="1200" cap="none" spc="0" normalizeH="0" baseline="0" noProof="0">
-                <a:ln>
-                  <a:noFill/>
-                </a:ln>
-                <a:solidFill>
-                  <a:srgbClr val="000000"/>
-                </a:solidFill>
-                <a:effectLst/>
-                <a:uLnTx/>
-                <a:uFillTx/>
-                <a:latin typeface="Microsoft JhengHei" panose="020B0604030504040204" pitchFamily="34" charset="-120"/>
-                <a:ea typeface="Microsoft JhengHei" panose="020B0604030504040204" pitchFamily="34" charset="-120"/>
-                <a:cs typeface="+mn-cs"/>
-              </a:rPr>
-              <a:t>Agent </a:t>
-            </a:r>
-            <a:r>
-              <a:rPr kumimoji="0" lang="zh-TW" altLang="en-US" sz="1400" b="0" i="0" u="none" strike="noStrike" kern="1200" cap="none" spc="0" normalizeH="0" baseline="0" noProof="0">
-                <a:ln>
-                  <a:noFill/>
-                </a:ln>
-                <a:solidFill>
-                  <a:srgbClr val="000000"/>
-                </a:solidFill>
-                <a:effectLst/>
-                <a:uLnTx/>
-                <a:uFillTx/>
-                <a:latin typeface="Microsoft JhengHei" panose="020B0604030504040204" pitchFamily="34" charset="-120"/>
-                <a:ea typeface="Microsoft JhengHei" panose="020B0604030504040204" pitchFamily="34" charset="-120"/>
-                <a:cs typeface="+mn-cs"/>
-              </a:rPr>
-              <a:t>推估：頻率 </a:t>
-            </a:r>
-            <a:r>
-              <a:rPr kumimoji="0" lang="en-US" altLang="zh-TW" sz="1400" b="0" i="0" u="none" strike="noStrike" kern="1200" cap="none" spc="0" normalizeH="0" baseline="0" noProof="0">
-                <a:ln>
-                  <a:noFill/>
-                </a:ln>
-                <a:solidFill>
-                  <a:srgbClr val="000000"/>
-                </a:solidFill>
-                <a:effectLst/>
-                <a:uLnTx/>
-                <a:uFillTx/>
-                <a:latin typeface="Microsoft JhengHei" panose="020B0604030504040204" pitchFamily="34" charset="-120"/>
-                <a:ea typeface="Microsoft JhengHei" panose="020B0604030504040204" pitchFamily="34" charset="-120"/>
-                <a:cs typeface="+mn-cs"/>
-              </a:rPr>
-              <a:t>× </a:t>
-            </a:r>
-            <a:r>
-              <a:rPr kumimoji="0" lang="zh-TW" altLang="en-US" sz="1400" b="0" i="0" u="none" strike="noStrike" kern="1200" cap="none" spc="0" normalizeH="0" baseline="0" noProof="0">
-                <a:ln>
-                  <a:noFill/>
-                </a:ln>
-                <a:solidFill>
-                  <a:srgbClr val="000000"/>
-                </a:solidFill>
-                <a:effectLst/>
-                <a:uLnTx/>
-                <a:uFillTx/>
-                <a:latin typeface="Microsoft JhengHei" panose="020B0604030504040204" pitchFamily="34" charset="-120"/>
-                <a:ea typeface="Microsoft JhengHei" panose="020B0604030504040204" pitchFamily="34" charset="-120"/>
-                <a:cs typeface="+mn-cs"/>
-              </a:rPr>
-              <a:t>單位省時；數值待部門實際數據校準）</a:t>
-            </a:r>
-            <a:endParaRPr kumimoji="0" sz="1400" b="0" i="0" u="none" strike="noStrike" kern="0" cap="none" spc="0" normalizeH="0" baseline="0" noProof="0">
-              <a:ln>
-                <a:noFill/>
-              </a:ln>
+              <a:rPr lang="zh-TW" altLang="en-US" sz="2000" b="1" kern="0" dirty="0">
+                <a:solidFill>
+                  <a:srgbClr val="000000"/>
+                </a:solidFill>
+                <a:latin typeface="Microsoft YaHei" panose="020B0503020204020204" pitchFamily="34" charset="-122"/>
+                <a:ea typeface="Microsoft YaHei" panose="020B0503020204020204" pitchFamily="34" charset="-122"/>
+              </a:rPr>
+              <a:t>量化效益</a:t>
+            </a:r>
+            <a:endParaRPr sz="2000" b="1" kern="0" dirty="0">
               <a:solidFill>
                 <a:srgbClr val="000000"/>
               </a:solidFill>
-              <a:effectLst/>
-              <a:uLnTx/>
-              <a:uFillTx/>
-              <a:latin typeface="Microsoft JhengHei" panose="020B0604030504040204" pitchFamily="34" charset="-120"/>
-              <a:ea typeface="Microsoft JhengHei" panose="020B0604030504040204" pitchFamily="34" charset="-120"/>
-              <a:cs typeface="Arial"/>
+              <a:latin typeface="Microsoft YaHei" panose="020B0503020204020204" pitchFamily="34" charset="-122"/>
+              <a:ea typeface="Microsoft YaHei" panose="020B0503020204020204" pitchFamily="34" charset="-122"/>
               <a:sym typeface="Arial"/>
             </a:endParaRPr>
           </a:p>
@@ -13288,8 +13753,8 @@
         </p:nvSpPr>
         <p:spPr>
           <a:xfrm>
-            <a:off x="368300" y="4038600"/>
-            <a:ext cx="11455400" cy="2413000"/>
+            <a:off x="368300" y="4555958"/>
+            <a:ext cx="11455400" cy="1895642"/>
           </a:xfrm>
           <a:prstGeom prst="rect">
             <a:avLst/>
@@ -13340,9 +13805,195 @@
                 <a:cs typeface="Microsoft JhengHei"/>
                 <a:sym typeface="Microsoft JhengHei"/>
               </a:rPr>
-              <a:t>[質化效益]</a:t>
-            </a:r>
-            <a:endParaRPr kumimoji="0" sz="1300" b="0" i="0" u="none" strike="noStrike" kern="0" cap="none" spc="0" normalizeH="0" baseline="0" noProof="0" dirty="0">
+              <a:t>• 品質控管：逾期、漏派、漏催變少，重要待辦與 KPI 缺口不漏接</a:t>
+            </a:r>
+          </a:p>
+          <a:p>
+            <a:pPr marL="0" marR="0" lvl="0" indent="0" algn="l" defTabSz="914400" rtl="0" eaLnBrk="1" fontAlgn="auto" latinLnBrk="0" hangingPunct="1">
+              <a:lnSpc>
+                <a:spcPct val="150000"/>
+              </a:lnSpc>
+              <a:spcBef>
+                <a:spcPts val="0"/>
+              </a:spcBef>
+              <a:spcAft>
+                <a:spcPts val="0"/>
+              </a:spcAft>
+              <a:buClr>
+                <a:srgbClr val="000000"/>
+              </a:buClr>
+              <a:buSzPts val="1400"/>
+              <a:buFont typeface="Arial"/>
+              <a:buNone/>
+              <a:tabLst/>
+              <a:defRPr/>
+            </a:pPr>
+            <a:r>
+              <a:rPr kumimoji="0" lang="en-US" altLang="zh-TW" sz="1300" b="0" i="0" u="none" strike="noStrike" kern="0" cap="none" spc="0" normalizeH="0" baseline="0" noProof="0" dirty="0">
+                <a:ln>
+                  <a:noFill/>
+                </a:ln>
+                <a:solidFill>
+                  <a:srgbClr val="000000"/>
+                </a:solidFill>
+                <a:effectLst/>
+                <a:uLnTx/>
+                <a:uFillTx/>
+                <a:latin typeface="Microsoft JhengHei"/>
+                <a:ea typeface="Microsoft JhengHei"/>
+                <a:cs typeface="Microsoft JhengHei"/>
+                <a:sym typeface="Microsoft JhengHei"/>
+              </a:rPr>
+              <a:t>• 效率提升：會議整理、催辦、查數、算缺口由人工改為「PM 確認為主」，大幅省時</a:t>
+            </a:r>
+          </a:p>
+          <a:p>
+            <a:pPr marL="0" marR="0" lvl="0" indent="0" algn="l" defTabSz="914400" rtl="0" eaLnBrk="1" fontAlgn="auto" latinLnBrk="0" hangingPunct="1">
+              <a:lnSpc>
+                <a:spcPct val="150000"/>
+              </a:lnSpc>
+              <a:spcBef>
+                <a:spcPts val="0"/>
+              </a:spcBef>
+              <a:spcAft>
+                <a:spcPts val="0"/>
+              </a:spcAft>
+              <a:buClr>
+                <a:srgbClr val="000000"/>
+              </a:buClr>
+              <a:buSzPts val="1400"/>
+              <a:buFont typeface="Arial"/>
+              <a:buNone/>
+              <a:tabLst/>
+              <a:defRPr/>
+            </a:pPr>
+            <a:r>
+              <a:rPr kumimoji="0" lang="en-US" altLang="zh-TW" sz="1300" b="0" i="0" u="none" strike="noStrike" kern="0" cap="none" spc="0" normalizeH="0" baseline="0" noProof="0" dirty="0">
+                <a:ln>
+                  <a:noFill/>
+                </a:ln>
+                <a:solidFill>
+                  <a:srgbClr val="000000"/>
+                </a:solidFill>
+                <a:effectLst/>
+                <a:uLnTx/>
+                <a:uFillTx/>
+                <a:latin typeface="Microsoft JhengHei"/>
+                <a:ea typeface="Microsoft JhengHei"/>
+                <a:cs typeface="Microsoft JhengHei"/>
+                <a:sym typeface="Microsoft JhengHei"/>
+              </a:rPr>
+              <a:t>• </a:t>
+            </a:r>
+            <a:r>
+              <a:rPr kumimoji="0" lang="en-US" altLang="zh-TW" sz="1300" b="0" i="0" u="none" strike="noStrike" kern="0" cap="none" spc="0" normalizeH="0" baseline="0" noProof="0" dirty="0" err="1">
+                <a:ln>
+                  <a:noFill/>
+                </a:ln>
+                <a:solidFill>
+                  <a:srgbClr val="000000"/>
+                </a:solidFill>
+                <a:effectLst/>
+                <a:uLnTx/>
+                <a:uFillTx/>
+                <a:latin typeface="Microsoft JhengHei"/>
+                <a:ea typeface="Microsoft JhengHei"/>
+                <a:cs typeface="Microsoft JhengHei"/>
+                <a:sym typeface="Microsoft JhengHei"/>
+              </a:rPr>
+              <a:t>法遵／稽核：決策、派單、查詢全程留痕可回溯</a:t>
+            </a:r>
+            <a:r>
+              <a:rPr kumimoji="0" lang="en-US" altLang="zh-TW" sz="1300" b="0" i="0" u="none" strike="noStrike" kern="0" cap="none" spc="0" normalizeH="0" baseline="0" noProof="0" dirty="0">
+                <a:ln>
+                  <a:noFill/>
+                </a:ln>
+                <a:solidFill>
+                  <a:srgbClr val="000000"/>
+                </a:solidFill>
+                <a:effectLst/>
+                <a:uLnTx/>
+                <a:uFillTx/>
+                <a:latin typeface="Microsoft JhengHei"/>
+                <a:ea typeface="Microsoft JhengHei"/>
+                <a:cs typeface="Microsoft JhengHei"/>
+                <a:sym typeface="Microsoft JhengHei"/>
+              </a:rPr>
+              <a:t>，</a:t>
+            </a:r>
+            <a:r>
+              <a:rPr kumimoji="0" lang="zh-TW" altLang="en-US" sz="1300" b="0" i="0" u="none" strike="noStrike" kern="0" cap="none" spc="0" normalizeH="0" baseline="0" noProof="0" dirty="0">
+                <a:ln>
+                  <a:noFill/>
+                </a:ln>
+                <a:solidFill>
+                  <a:srgbClr val="000000"/>
+                </a:solidFill>
+                <a:effectLst/>
+                <a:uLnTx/>
+                <a:uFillTx/>
+                <a:latin typeface="Microsoft JhengHei"/>
+                <a:ea typeface="Microsoft JhengHei"/>
+                <a:cs typeface="Microsoft JhengHei"/>
+                <a:sym typeface="Microsoft JhengHei"/>
+              </a:rPr>
+              <a:t>資料存於公司雲端</a:t>
+            </a:r>
+            <a:r>
+              <a:rPr kumimoji="0" lang="en-US" altLang="zh-TW" sz="1300" b="0" i="0" u="none" strike="noStrike" kern="0" cap="none" spc="0" normalizeH="0" baseline="0" noProof="0" dirty="0">
+                <a:ln>
+                  <a:noFill/>
+                </a:ln>
+                <a:solidFill>
+                  <a:srgbClr val="000000"/>
+                </a:solidFill>
+                <a:effectLst/>
+                <a:uLnTx/>
+                <a:uFillTx/>
+                <a:latin typeface="Microsoft JhengHei"/>
+                <a:ea typeface="Microsoft JhengHei"/>
+                <a:cs typeface="Microsoft JhengHei"/>
+                <a:sym typeface="Microsoft JhengHei"/>
+              </a:rPr>
+              <a:t>，</a:t>
+            </a:r>
+            <a:r>
+              <a:rPr kumimoji="0" lang="zh-TW" altLang="en-US" sz="1300" b="0" i="0" u="none" strike="noStrike" kern="0" cap="none" spc="0" normalizeH="0" baseline="0" noProof="0" dirty="0">
+                <a:ln>
+                  <a:noFill/>
+                </a:ln>
+                <a:solidFill>
+                  <a:srgbClr val="000000"/>
+                </a:solidFill>
+                <a:effectLst/>
+                <a:uLnTx/>
+                <a:uFillTx/>
+                <a:latin typeface="Microsoft JhengHei"/>
+                <a:ea typeface="Microsoft JhengHei"/>
+                <a:cs typeface="Microsoft JhengHei"/>
+                <a:sym typeface="Microsoft JhengHei"/>
+              </a:rPr>
+              <a:t>符合資安</a:t>
+            </a:r>
+            <a:r>
+              <a:rPr kumimoji="0" lang="en-US" altLang="zh-TW" sz="1300" b="0" i="0" u="none" strike="noStrike" kern="0" cap="none" spc="0" normalizeH="0" baseline="0" noProof="0" dirty="0" err="1">
+                <a:ln>
+                  <a:noFill/>
+                </a:ln>
+                <a:solidFill>
+                  <a:srgbClr val="000000"/>
+                </a:solidFill>
+                <a:effectLst/>
+                <a:uLnTx/>
+                <a:uFillTx/>
+                <a:latin typeface="Microsoft JhengHei"/>
+                <a:ea typeface="Microsoft JhengHei"/>
+                <a:cs typeface="Microsoft JhengHei"/>
+                <a:sym typeface="Microsoft JhengHei"/>
+              </a:rPr>
+              <a:t>要求</a:t>
+            </a:r>
+            <a:endParaRPr kumimoji="0" lang="en-US" altLang="zh-TW" sz="1300" b="0" i="0" u="none" strike="noStrike" kern="0" cap="none" spc="0" normalizeH="0" baseline="0" noProof="0" dirty="0">
               <a:ln>
                 <a:noFill/>
               </a:ln>
@@ -13394,8 +14045,41 @@
                 <a:cs typeface="Microsoft JhengHei"/>
                 <a:sym typeface="Microsoft JhengHei"/>
               </a:rPr>
-              <a:t>• 品質控管：逾期、漏派、漏催變少，重要待辦與 KPI 缺口不漏接</a:t>
-            </a:r>
+              <a:t>• </a:t>
+            </a:r>
+            <a:r>
+              <a:rPr kumimoji="0" lang="en-US" altLang="zh-TW" sz="1300" b="0" i="0" u="none" strike="noStrike" kern="0" cap="none" spc="0" normalizeH="0" baseline="0" noProof="0" dirty="0" err="1">
+                <a:ln>
+                  <a:noFill/>
+                </a:ln>
+                <a:solidFill>
+                  <a:srgbClr val="000000"/>
+                </a:solidFill>
+                <a:effectLst/>
+                <a:uLnTx/>
+                <a:uFillTx/>
+                <a:latin typeface="Microsoft JhengHei"/>
+                <a:ea typeface="Microsoft JhengHei"/>
+                <a:cs typeface="Microsoft JhengHei"/>
+                <a:sym typeface="Microsoft JhengHei"/>
+              </a:rPr>
+              <a:t>可規模化：一次建置、多專案共用</a:t>
+            </a:r>
+            <a:endParaRPr kumimoji="0" lang="en-US" altLang="zh-TW" sz="1300" b="0" i="0" u="none" strike="noStrike" kern="0" cap="none" spc="0" normalizeH="0" baseline="0" noProof="0" dirty="0">
+              <a:ln>
+                <a:noFill/>
+              </a:ln>
+              <a:solidFill>
+                <a:srgbClr val="000000"/>
+              </a:solidFill>
+              <a:effectLst/>
+              <a:uLnTx/>
+              <a:uFillTx/>
+              <a:latin typeface="Microsoft JhengHei"/>
+              <a:ea typeface="Microsoft JhengHei"/>
+              <a:cs typeface="Microsoft JhengHei"/>
+              <a:sym typeface="Microsoft JhengHei"/>
+            </a:endParaRPr>
           </a:p>
           <a:p>
             <a:pPr marL="0" marR="0" lvl="0" indent="0" algn="l" defTabSz="914400" rtl="0" eaLnBrk="1" fontAlgn="auto" latinLnBrk="0" hangingPunct="1">
@@ -13433,31 +14117,10 @@
                 <a:cs typeface="Microsoft JhengHei"/>
                 <a:sym typeface="Microsoft JhengHei"/>
               </a:rPr>
-              <a:t>• 效率提升：會議整理、催辦、查數、算缺口由人工改為「PM 確認為主」，大幅省時</a:t>
-            </a:r>
-          </a:p>
-          <a:p>
-            <a:pPr marL="0" marR="0" lvl="0" indent="0" algn="l" defTabSz="914400" rtl="0" eaLnBrk="1" fontAlgn="auto" latinLnBrk="0" hangingPunct="1">
-              <a:lnSpc>
-                <a:spcPct val="150000"/>
-              </a:lnSpc>
-              <a:spcBef>
-                <a:spcPts val="0"/>
-              </a:spcBef>
-              <a:spcAft>
-                <a:spcPts val="0"/>
-              </a:spcAft>
-              <a:buClr>
-                <a:srgbClr val="000000"/>
-              </a:buClr>
-              <a:buSzPts val="1400"/>
-              <a:buFont typeface="Arial"/>
-              <a:buNone/>
-              <a:tabLst/>
-              <a:defRPr/>
-            </a:pPr>
-            <a:r>
-              <a:rPr kumimoji="0" lang="en-US" altLang="zh-TW" sz="1300" b="0" i="0" u="none" strike="noStrike" kern="0" cap="none" spc="0" normalizeH="0" baseline="0" noProof="0" dirty="0">
+              <a:t>• </a:t>
+            </a:r>
+            <a:r>
+              <a:rPr kumimoji="0" lang="en-US" altLang="zh-TW" sz="1300" b="0" i="0" u="none" strike="noStrike" kern="0" cap="none" spc="0" normalizeH="0" baseline="0" noProof="0" dirty="0" err="1">
                 <a:ln>
                   <a:noFill/>
                 </a:ln>
@@ -13472,194 +14135,23 @@
                 <a:cs typeface="Microsoft JhengHei"/>
                 <a:sym typeface="Microsoft JhengHei"/>
               </a:rPr>
-              <a:t>• </a:t>
-            </a:r>
-            <a:r>
-              <a:rPr kumimoji="0" lang="en-US" altLang="zh-TW" sz="1300" b="0" i="0" u="none" strike="noStrike" kern="0" cap="none" spc="0" normalizeH="0" baseline="0" noProof="0" dirty="0" err="1">
-                <a:ln>
-                  <a:noFill/>
-                </a:ln>
-                <a:solidFill>
-                  <a:srgbClr val="000000"/>
-                </a:solidFill>
-                <a:effectLst/>
-                <a:uLnTx/>
-                <a:uFillTx/>
-                <a:latin typeface="Microsoft JhengHei"/>
-                <a:ea typeface="Microsoft JhengHei"/>
-                <a:cs typeface="Microsoft JhengHei"/>
-                <a:sym typeface="Microsoft JhengHei"/>
-              </a:rPr>
-              <a:t>法遵／稽核：決策、派單、查詢全程留痕可回溯</a:t>
-            </a:r>
-            <a:r>
-              <a:rPr kumimoji="0" lang="en-US" altLang="zh-TW" sz="1300" b="0" i="0" u="none" strike="noStrike" kern="0" cap="none" spc="0" normalizeH="0" baseline="0" noProof="0" dirty="0">
-                <a:ln>
-                  <a:noFill/>
-                </a:ln>
-                <a:solidFill>
-                  <a:srgbClr val="000000"/>
-                </a:solidFill>
-                <a:effectLst/>
-                <a:uLnTx/>
-                <a:uFillTx/>
-                <a:latin typeface="Microsoft JhengHei"/>
-                <a:ea typeface="Microsoft JhengHei"/>
-                <a:cs typeface="Microsoft JhengHei"/>
-                <a:sym typeface="Microsoft JhengHei"/>
-              </a:rPr>
-              <a:t>，</a:t>
-            </a:r>
-            <a:r>
-              <a:rPr kumimoji="0" lang="zh-TW" altLang="en-US" sz="1300" b="0" i="0" u="none" strike="noStrike" kern="0" cap="none" spc="0" normalizeH="0" baseline="0" noProof="0" dirty="0">
-                <a:ln>
-                  <a:noFill/>
-                </a:ln>
-                <a:solidFill>
-                  <a:srgbClr val="000000"/>
-                </a:solidFill>
-                <a:effectLst/>
-                <a:uLnTx/>
-                <a:uFillTx/>
-                <a:latin typeface="Microsoft JhengHei"/>
-                <a:ea typeface="Microsoft JhengHei"/>
-                <a:cs typeface="Microsoft JhengHei"/>
-                <a:sym typeface="Microsoft JhengHei"/>
-              </a:rPr>
-              <a:t>資料存於 </a:t>
-            </a:r>
-            <a:r>
-              <a:rPr kumimoji="0" lang="en-US" altLang="zh-TW" sz="1300" b="0" i="0" u="none" strike="noStrike" kern="0" cap="none" spc="0" normalizeH="0" baseline="0" noProof="0" dirty="0">
-                <a:ln>
-                  <a:noFill/>
-                </a:ln>
-                <a:solidFill>
-                  <a:srgbClr val="000000"/>
-                </a:solidFill>
-                <a:effectLst/>
-                <a:uLnTx/>
-                <a:uFillTx/>
-                <a:latin typeface="Microsoft JhengHei"/>
-                <a:ea typeface="Microsoft JhengHei"/>
-                <a:cs typeface="Microsoft JhengHei"/>
-                <a:sym typeface="Microsoft JhengHei"/>
-              </a:rPr>
-              <a:t>Microsoft Cloud </a:t>
-            </a:r>
-            <a:r>
-              <a:rPr kumimoji="0" lang="zh-TW" altLang="en-US" sz="1300" b="0" i="0" u="none" strike="noStrike" kern="0" cap="none" spc="0" normalizeH="0" baseline="0" noProof="0" dirty="0">
-                <a:ln>
-                  <a:noFill/>
-                </a:ln>
-                <a:solidFill>
-                  <a:srgbClr val="000000"/>
-                </a:solidFill>
-                <a:effectLst/>
-                <a:uLnTx/>
-                <a:uFillTx/>
-                <a:latin typeface="Microsoft JhengHei"/>
-                <a:ea typeface="Microsoft JhengHei"/>
-                <a:cs typeface="Microsoft JhengHei"/>
-                <a:sym typeface="Microsoft JhengHei"/>
-              </a:rPr>
-              <a:t>信任邊界</a:t>
-            </a:r>
-            <a:r>
-              <a:rPr kumimoji="0" lang="en-US" altLang="zh-TW" sz="1300" b="0" i="0" u="none" strike="noStrike" kern="0" cap="none" spc="0" normalizeH="0" baseline="0" noProof="0" dirty="0">
-                <a:ln>
-                  <a:noFill/>
-                </a:ln>
-                <a:solidFill>
-                  <a:srgbClr val="000000"/>
-                </a:solidFill>
-                <a:effectLst/>
-                <a:uLnTx/>
-                <a:uFillTx/>
-                <a:latin typeface="Microsoft JhengHei"/>
-                <a:ea typeface="Microsoft JhengHei"/>
-                <a:cs typeface="Microsoft JhengHei"/>
-                <a:sym typeface="Microsoft JhengHei"/>
-              </a:rPr>
-              <a:t>，符合金融業要求</a:t>
-            </a:r>
-          </a:p>
-          <a:p>
-            <a:pPr marL="0" marR="0" lvl="0" indent="0" algn="l" defTabSz="914400" rtl="0" eaLnBrk="1" fontAlgn="auto" latinLnBrk="0" hangingPunct="1">
-              <a:lnSpc>
-                <a:spcPct val="150000"/>
-              </a:lnSpc>
-              <a:spcBef>
-                <a:spcPts val="0"/>
-              </a:spcBef>
-              <a:spcAft>
-                <a:spcPts val="0"/>
-              </a:spcAft>
-              <a:buClr>
+              <a:t>風險預防：關鍵事項不漏辦、數據口徑受控，降低因疏失造成的損失</a:t>
+            </a:r>
+            <a:endParaRPr kumimoji="0" lang="en-US" altLang="zh-TW" sz="1300" b="0" i="0" u="none" strike="noStrike" kern="0" cap="none" spc="0" normalizeH="0" baseline="0" noProof="0" dirty="0">
+              <a:ln>
+                <a:noFill/>
+              </a:ln>
+              <a:solidFill>
                 <a:srgbClr val="000000"/>
-              </a:buClr>
-              <a:buSzPts val="1400"/>
-              <a:buFont typeface="Arial"/>
-              <a:buNone/>
-              <a:tabLst/>
-              <a:defRPr/>
-            </a:pPr>
-            <a:r>
-              <a:rPr kumimoji="0" lang="en-US" altLang="zh-TW" sz="1300" b="0" i="0" u="none" strike="noStrike" kern="0" cap="none" spc="0" normalizeH="0" baseline="0" noProof="0" dirty="0">
-                <a:ln>
-                  <a:noFill/>
-                </a:ln>
-                <a:solidFill>
-                  <a:srgbClr val="000000"/>
-                </a:solidFill>
-                <a:effectLst/>
-                <a:uLnTx/>
-                <a:uFillTx/>
-                <a:latin typeface="Microsoft JhengHei"/>
-                <a:ea typeface="Microsoft JhengHei"/>
-                <a:cs typeface="Microsoft JhengHei"/>
-                <a:sym typeface="Microsoft JhengHei"/>
-              </a:rPr>
-              <a:t>• 可規模化：數位經營部約 5 位同性質 PM 可沿用，一次建置、多專案共用</a:t>
-            </a:r>
-          </a:p>
-          <a:p>
-            <a:pPr marL="0" marR="0" lvl="0" indent="0" algn="l" defTabSz="914400" rtl="0" eaLnBrk="1" fontAlgn="auto" latinLnBrk="0" hangingPunct="1">
-              <a:lnSpc>
-                <a:spcPct val="150000"/>
-              </a:lnSpc>
-              <a:spcBef>
-                <a:spcPts val="0"/>
-              </a:spcBef>
-              <a:spcAft>
-                <a:spcPts val="0"/>
-              </a:spcAft>
-              <a:buClr>
-                <a:srgbClr val="000000"/>
-              </a:buClr>
-              <a:buSzPts val="1400"/>
-              <a:buFont typeface="Arial"/>
-              <a:buNone/>
-              <a:tabLst/>
-              <a:defRPr/>
-            </a:pPr>
-            <a:r>
-              <a:rPr kumimoji="0" lang="en-US" altLang="zh-TW" sz="1300" b="0" i="0" u="none" strike="noStrike" kern="0" cap="none" spc="0" normalizeH="0" baseline="0" noProof="0" dirty="0">
-                <a:ln>
-                  <a:noFill/>
-                </a:ln>
-                <a:solidFill>
-                  <a:srgbClr val="000000"/>
-                </a:solidFill>
-                <a:effectLst/>
-                <a:uLnTx/>
-                <a:uFillTx/>
-                <a:latin typeface="Microsoft JhengHei"/>
-                <a:ea typeface="Microsoft JhengHei"/>
-                <a:cs typeface="Microsoft JhengHei"/>
-                <a:sym typeface="Microsoft JhengHei"/>
-              </a:rPr>
-              <a:t>• 風險預防：關鍵事項不漏辦、數據口徑受控（白名單），降低因疏失造成的損失</a:t>
-            </a:r>
+              </a:solidFill>
+              <a:effectLst/>
+              <a:uLnTx/>
+              <a:uFillTx/>
+              <a:latin typeface="Microsoft JhengHei"/>
+              <a:ea typeface="Microsoft JhengHei"/>
+              <a:cs typeface="Microsoft JhengHei"/>
+              <a:sym typeface="Microsoft JhengHei"/>
+            </a:endParaRPr>
           </a:p>
         </p:txBody>
       </p:sp>
@@ -13678,7 +14170,7 @@
           <p:nvPr>
             <p:extLst>
               <p:ext uri="{D42A27DB-BD31-4B8C-83A1-F6EECF244321}">
-                <p14:modId xmlns:p14="http://schemas.microsoft.com/office/powerpoint/2010/main" val="1087465433"/>
+                <p14:modId xmlns:p14="http://schemas.microsoft.com/office/powerpoint/2010/main" val="2263633523"/>
               </p:ext>
             </p:extLst>
           </p:nvPr>
@@ -14099,7 +14591,7 @@
                           <a:latin typeface="Microsoft JhengHei" panose="020B0604030504040204" pitchFamily="34" charset="-120"/>
                           <a:ea typeface="Microsoft JhengHei" panose="020B0604030504040204" pitchFamily="34" charset="-120"/>
                         </a:rPr>
-                        <a:t>42 </a:t>
+                        <a:t>13 </a:t>
                       </a:r>
                       <a:r>
                         <a:rPr lang="zh-TW" altLang="en-US" sz="1200" b="1" dirty="0">
@@ -14250,7 +14742,7 @@
                     <a:p>
                       <a:pPr algn="ctr"/>
                       <a:r>
-                        <a:rPr lang="zh-TW" altLang="en-US" sz="1200" b="1">
+                        <a:rPr lang="zh-TW" altLang="en-US" sz="1200" b="1" dirty="0">
                           <a:solidFill>
                             <a:srgbClr val="000000"/>
                           </a:solidFill>
@@ -14260,17 +14752,17 @@
                         <a:t>約 </a:t>
                       </a:r>
                       <a:r>
-                        <a:rPr lang="en-US" altLang="zh-TW" sz="1200" b="1">
+                        <a:rPr lang="en-US" altLang="zh-TW" sz="1200" b="1" dirty="0">
                           <a:solidFill>
                             <a:srgbClr val="000000"/>
                           </a:solidFill>
                           <a:latin typeface="Microsoft JhengHei" panose="020B0604030504040204" pitchFamily="34" charset="-120"/>
                           <a:ea typeface="Microsoft JhengHei" panose="020B0604030504040204" pitchFamily="34" charset="-120"/>
                         </a:rPr>
-                        <a:t>71 </a:t>
+                        <a:t>41 </a:t>
                       </a:r>
                       <a:r>
-                        <a:rPr lang="zh-TW" altLang="en-US" sz="1200" b="1">
+                        <a:rPr lang="zh-TW" altLang="en-US" sz="1200" b="1" dirty="0">
                           <a:solidFill>
                             <a:srgbClr val="000000"/>
                           </a:solidFill>
@@ -14458,7 +14950,7 @@
                     <a:p>
                       <a:pPr algn="ctr"/>
                       <a:r>
-                        <a:rPr lang="zh-TW" altLang="en-US" sz="1200" b="1">
+                        <a:rPr lang="zh-TW" altLang="en-US" sz="1200" b="1" dirty="0">
                           <a:solidFill>
                             <a:srgbClr val="000000"/>
                           </a:solidFill>
@@ -14468,17 +14960,17 @@
                         <a:t>約 </a:t>
                       </a:r>
                       <a:r>
-                        <a:rPr lang="en-US" altLang="zh-TW" sz="1200" b="1">
+                        <a:rPr lang="en-US" altLang="zh-TW" sz="1200" b="1" dirty="0">
                           <a:solidFill>
                             <a:srgbClr val="000000"/>
                           </a:solidFill>
                           <a:latin typeface="Microsoft JhengHei" panose="020B0604030504040204" pitchFamily="34" charset="-120"/>
                           <a:ea typeface="Microsoft JhengHei" panose="020B0604030504040204" pitchFamily="34" charset="-120"/>
                         </a:rPr>
-                        <a:t>67 </a:t>
+                        <a:t>30 </a:t>
                       </a:r>
                       <a:r>
-                        <a:rPr lang="zh-TW" altLang="en-US" sz="1200" b="1">
+                        <a:rPr lang="zh-TW" altLang="en-US" sz="1200" b="1" dirty="0">
                           <a:solidFill>
                             <a:srgbClr val="000000"/>
                           </a:solidFill>
@@ -14656,7 +15148,7 @@
                     <a:p>
                       <a:pPr algn="ctr"/>
                       <a:r>
-                        <a:rPr lang="zh-TW" altLang="en-US" sz="1200" b="1">
+                        <a:rPr lang="zh-TW" altLang="en-US" sz="1200" b="1" dirty="0">
                           <a:solidFill>
                             <a:srgbClr val="000000"/>
                           </a:solidFill>
@@ -14666,17 +15158,17 @@
                         <a:t>約 </a:t>
                       </a:r>
                       <a:r>
-                        <a:rPr lang="en-US" altLang="zh-TW" sz="1200" b="1">
+                        <a:rPr lang="en-US" altLang="zh-TW" sz="1200" b="1" dirty="0">
                           <a:solidFill>
                             <a:srgbClr val="000000"/>
                           </a:solidFill>
                           <a:latin typeface="Microsoft JhengHei" panose="020B0604030504040204" pitchFamily="34" charset="-120"/>
                           <a:ea typeface="Microsoft JhengHei" panose="020B0604030504040204" pitchFamily="34" charset="-120"/>
                         </a:rPr>
-                        <a:t>26 </a:t>
+                        <a:t>16 </a:t>
                       </a:r>
                       <a:r>
-                        <a:rPr lang="zh-TW" altLang="en-US" sz="1200" b="1">
+                        <a:rPr lang="zh-TW" altLang="en-US" sz="1200" b="1" dirty="0">
                           <a:solidFill>
                             <a:srgbClr val="000000"/>
                           </a:solidFill>
@@ -14707,7 +15199,7 @@
                     <a:p>
                       <a:pPr algn="l"/>
                       <a:r>
-                        <a:rPr lang="zh-TW" altLang="en-US" sz="1200" b="1">
+                        <a:rPr lang="zh-TW" altLang="en-US" sz="1200" b="1" dirty="0">
                           <a:solidFill>
                             <a:srgbClr val="000000"/>
                           </a:solidFill>
@@ -14717,7 +15209,7 @@
                         <a:t>合計（單一 </a:t>
                       </a:r>
                       <a:r>
-                        <a:rPr lang="en-US" altLang="zh-TW" sz="1200" b="1">
+                        <a:rPr lang="en-US" altLang="zh-TW" sz="1200" b="1" dirty="0">
                           <a:solidFill>
                             <a:srgbClr val="000000"/>
                           </a:solidFill>
@@ -14727,7 +15219,7 @@
                         <a:t>PM</a:t>
                       </a:r>
                       <a:r>
-                        <a:rPr lang="zh-TW" altLang="en-US" sz="1200" b="1">
+                        <a:rPr lang="zh-TW" altLang="en-US" sz="1200" b="1" dirty="0">
                           <a:solidFill>
                             <a:srgbClr val="000000"/>
                           </a:solidFill>
@@ -14782,7 +15274,7 @@
                     <a:p>
                       <a:pPr algn="ctr"/>
                       <a:r>
-                        <a:rPr lang="en-US" altLang="zh-TW" sz="1200" b="1">
+                        <a:rPr lang="en-US" altLang="zh-TW" sz="1200" b="1" dirty="0">
                           <a:solidFill>
                             <a:srgbClr val="000000"/>
                           </a:solidFill>
@@ -14791,7 +15283,7 @@
                         </a:rPr>
                         <a:t>—</a:t>
                       </a:r>
-                      <a:endParaRPr lang="zh-TW" altLang="en-US" sz="1200" b="1">
+                      <a:endParaRPr lang="zh-TW" altLang="en-US" sz="1200" b="1" dirty="0">
                         <a:solidFill>
                           <a:srgbClr val="000000"/>
                         </a:solidFill>
@@ -14813,7 +15305,7 @@
                     <a:p>
                       <a:pPr algn="ctr"/>
                       <a:r>
-                        <a:rPr lang="en-US" altLang="zh-TW" sz="1200" b="1">
+                        <a:rPr lang="en-US" altLang="zh-TW" sz="1200" b="1" dirty="0">
                           <a:solidFill>
                             <a:srgbClr val="000000"/>
                           </a:solidFill>
@@ -14822,7 +15314,7 @@
                         </a:rPr>
                         <a:t>—</a:t>
                       </a:r>
-                      <a:endParaRPr lang="zh-TW" altLang="en-US" sz="1200" b="1">
+                      <a:endParaRPr lang="zh-TW" altLang="en-US" sz="1200" b="1" dirty="0">
                         <a:solidFill>
                           <a:srgbClr val="000000"/>
                         </a:solidFill>
@@ -14861,7 +15353,7 @@
                           <a:latin typeface="Microsoft JhengHei" panose="020B0604030504040204" pitchFamily="34" charset="-120"/>
                           <a:ea typeface="Microsoft JhengHei" panose="020B0604030504040204" pitchFamily="34" charset="-120"/>
                         </a:rPr>
-                        <a:t>206 </a:t>
+                        <a:t>85 </a:t>
                       </a:r>
                       <a:r>
                         <a:rPr lang="zh-TW" altLang="en-US" sz="1200" b="1" dirty="0">
@@ -14937,7 +15429,7 @@
               <a:defRPr/>
             </a:pPr>
             <a:r>
-              <a:rPr kumimoji="0" lang="zh-TW" altLang="en-US" sz="1300" b="1" i="0" u="none" strike="noStrike" kern="1200" cap="none" spc="0" normalizeH="0" baseline="0" noProof="0">
+              <a:rPr kumimoji="0" lang="zh-TW" altLang="en-US" sz="1300" b="1" i="0" u="none" strike="noStrike" kern="1200" cap="none" spc="0" normalizeH="0" baseline="0" noProof="0" dirty="0">
                 <a:ln>
                   <a:noFill/>
                 </a:ln>
@@ -14954,7 +15446,7 @@
               <a:t>▶ 以數位經營部約 </a:t>
             </a:r>
             <a:r>
-              <a:rPr kumimoji="0" lang="en-US" altLang="zh-TW" sz="1300" b="1" i="0" u="none" strike="noStrike" kern="1200" cap="none" spc="0" normalizeH="0" baseline="0" noProof="0">
+              <a:rPr kumimoji="0" lang="en-US" altLang="zh-TW" sz="1300" b="1" i="0" u="none" strike="noStrike" kern="1200" cap="none" spc="0" normalizeH="0" baseline="0" noProof="0" dirty="0">
                 <a:ln>
                   <a:noFill/>
                 </a:ln>
@@ -14971,7 +15463,7 @@
               <a:t>5 </a:t>
             </a:r>
             <a:r>
-              <a:rPr kumimoji="0" lang="zh-TW" altLang="en-US" sz="1300" b="1" i="0" u="none" strike="noStrike" kern="1200" cap="none" spc="0" normalizeH="0" baseline="0" noProof="0">
+              <a:rPr kumimoji="0" lang="zh-TW" altLang="en-US" sz="1300" b="1" i="0" u="none" strike="noStrike" kern="1200" cap="none" spc="0" normalizeH="0" baseline="0" noProof="0" dirty="0">
                 <a:ln>
                   <a:noFill/>
                 </a:ln>
@@ -14988,7 +15480,7 @@
               <a:t>位同性質 </a:t>
             </a:r>
             <a:r>
-              <a:rPr kumimoji="0" lang="en-US" altLang="zh-TW" sz="1300" b="1" i="0" u="none" strike="noStrike" kern="1200" cap="none" spc="0" normalizeH="0" baseline="0" noProof="0">
+              <a:rPr kumimoji="0" lang="en-US" altLang="zh-TW" sz="1300" b="1" i="0" u="none" strike="noStrike" kern="1200" cap="none" spc="0" normalizeH="0" baseline="0" noProof="0" dirty="0">
                 <a:ln>
                   <a:noFill/>
                 </a:ln>
@@ -15005,7 +15497,7 @@
               <a:t>PM </a:t>
             </a:r>
             <a:r>
-              <a:rPr kumimoji="0" lang="zh-TW" altLang="en-US" sz="1300" b="1" i="0" u="none" strike="noStrike" kern="1200" cap="none" spc="0" normalizeH="0" baseline="0" noProof="0">
+              <a:rPr kumimoji="0" lang="zh-TW" altLang="en-US" sz="1300" b="1" i="0" u="none" strike="noStrike" kern="1200" cap="none" spc="0" normalizeH="0" baseline="0" noProof="0" dirty="0">
                 <a:ln>
                   <a:noFill/>
                 </a:ln>
@@ -15022,7 +15514,7 @@
               <a:t>計，全部門年省約 </a:t>
             </a:r>
             <a:r>
-              <a:rPr kumimoji="0" lang="en-US" altLang="zh-TW" sz="1300" b="1" i="0" u="none" strike="noStrike" kern="1200" cap="none" spc="0" normalizeH="0" baseline="0" noProof="0">
+              <a:rPr kumimoji="0" lang="en-US" altLang="zh-TW" sz="1300" b="1" i="0" u="none" strike="noStrike" kern="1200" cap="none" spc="0" normalizeH="0" baseline="0" noProof="0" dirty="0">
                 <a:ln>
                   <a:noFill/>
                 </a:ln>
@@ -15036,10 +15528,10 @@
                 <a:ea typeface="Microsoft JhengHei" panose="020B0604030504040204" pitchFamily="34" charset="-120"/>
                 <a:cs typeface="+mn-cs"/>
               </a:rPr>
-              <a:t>1,030 </a:t>
-            </a:r>
-            <a:r>
-              <a:rPr kumimoji="0" lang="zh-TW" altLang="en-US" sz="1300" b="1" i="0" u="none" strike="noStrike" kern="1200" cap="none" spc="0" normalizeH="0" baseline="0" noProof="0">
+              <a:t>420 </a:t>
+            </a:r>
+            <a:r>
+              <a:rPr kumimoji="0" lang="zh-TW" altLang="en-US" sz="1300" b="1" i="0" u="none" strike="noStrike" kern="1200" cap="none" spc="0" normalizeH="0" baseline="0" noProof="0" dirty="0">
                 <a:ln>
                   <a:noFill/>
                 </a:ln>
@@ -15056,7 +15548,17 @@
               <a:t>小時 ≈ </a:t>
             </a:r>
             <a:r>
-              <a:rPr kumimoji="0" lang="en-US" altLang="zh-TW" sz="1300" b="1" i="0" u="none" strike="noStrike" kern="1200" cap="none" spc="0" normalizeH="0" baseline="0" noProof="0">
+              <a:rPr lang="en-US" altLang="zh-TW" sz="1300" b="1" dirty="0">
+                <a:solidFill>
+                  <a:srgbClr val="CC492B"/>
+                </a:solidFill>
+                <a:latin typeface="Microsoft JhengHei" panose="020B0604030504040204" pitchFamily="34" charset="-120"/>
+                <a:ea typeface="Microsoft JhengHei" panose="020B0604030504040204" pitchFamily="34" charset="-120"/>
+              </a:rPr>
+              <a:t>52</a:t>
+            </a:r>
+            <a:r>
+              <a:rPr kumimoji="0" lang="en-US" altLang="zh-TW" sz="1300" b="1" i="0" u="none" strike="noStrike" kern="1200" cap="none" spc="0" normalizeH="0" baseline="0" noProof="0" dirty="0">
                 <a:ln>
                   <a:noFill/>
                 </a:ln>
@@ -15070,10 +15572,10 @@
                 <a:ea typeface="Microsoft JhengHei" panose="020B0604030504040204" pitchFamily="34" charset="-120"/>
                 <a:cs typeface="+mn-cs"/>
               </a:rPr>
-              <a:t>129 </a:t>
-            </a:r>
-            <a:r>
-              <a:rPr kumimoji="0" lang="zh-TW" altLang="en-US" sz="1300" b="1" i="0" u="none" strike="noStrike" kern="1200" cap="none" spc="0" normalizeH="0" baseline="0" noProof="0">
+              <a:t> </a:t>
+            </a:r>
+            <a:r>
+              <a:rPr kumimoji="0" lang="zh-TW" altLang="en-US" sz="1300" b="1" i="0" u="none" strike="noStrike" kern="1200" cap="none" spc="0" normalizeH="0" baseline="0" noProof="0" dirty="0">
                 <a:ln>
                   <a:noFill/>
                 </a:ln>
@@ -15089,6 +15591,77 @@
               </a:rPr>
               <a:t>個工作天；一次建置、多專案共用。</a:t>
             </a:r>
+          </a:p>
+        </p:txBody>
+      </p:sp>
+      <p:sp>
+        <p:nvSpPr>
+          <p:cNvPr id="4" name="Google Shape;85;g3e9888fc26a_0_5">
+            <a:extLst>
+              <a:ext uri="{FF2B5EF4-FFF2-40B4-BE49-F238E27FC236}">
+                <a16:creationId xmlns:a16="http://schemas.microsoft.com/office/drawing/2014/main" id="{EAF509D0-1A72-8D6E-B0E5-2BC3A2E3A46A}"/>
+              </a:ext>
+            </a:extLst>
+          </p:cNvPr>
+          <p:cNvSpPr txBox="1"/>
+          <p:nvPr/>
+        </p:nvSpPr>
+        <p:spPr>
+          <a:xfrm>
+            <a:off x="365895" y="4155889"/>
+            <a:ext cx="7693200" cy="400069"/>
+          </a:xfrm>
+          <a:prstGeom prst="rect">
+            <a:avLst/>
+          </a:prstGeom>
+          <a:noFill/>
+          <a:ln>
+            <a:noFill/>
+          </a:ln>
+        </p:spPr>
+        <p:txBody>
+          <a:bodyPr spcFirstLastPara="1" wrap="square" lIns="91425" tIns="45700" rIns="91425" bIns="45700" anchor="t" anchorCtr="0">
+            <a:spAutoFit/>
+          </a:bodyPr>
+          <a:lstStyle/>
+          <a:p>
+            <a:pPr marL="0" marR="0" lvl="0" indent="0" algn="l" defTabSz="914400" rtl="0" eaLnBrk="1" fontAlgn="auto" latinLnBrk="0" hangingPunct="1">
+              <a:lnSpc>
+                <a:spcPct val="100000"/>
+              </a:lnSpc>
+              <a:spcBef>
+                <a:spcPts val="0"/>
+              </a:spcBef>
+              <a:spcAft>
+                <a:spcPts val="0"/>
+              </a:spcAft>
+              <a:buClr>
+                <a:srgbClr val="FF0000"/>
+              </a:buClr>
+              <a:buSzPts val="1800"/>
+              <a:buFont typeface="Arial"/>
+              <a:buNone/>
+              <a:tabLst/>
+              <a:defRPr/>
+            </a:pPr>
+            <a:r>
+              <a:rPr lang="zh-TW" altLang="en-US" sz="2000" b="1" kern="0" dirty="0">
+                <a:solidFill>
+                  <a:srgbClr val="000000"/>
+                </a:solidFill>
+                <a:latin typeface="Microsoft YaHei" panose="020B0503020204020204" pitchFamily="34" charset="-122"/>
+                <a:ea typeface="Microsoft YaHei" panose="020B0503020204020204" pitchFamily="34" charset="-122"/>
+              </a:rPr>
+              <a:t>質化效益</a:t>
+            </a:r>
+            <a:endParaRPr sz="2000" b="1" kern="0" dirty="0">
+              <a:solidFill>
+                <a:srgbClr val="000000"/>
+              </a:solidFill>
+              <a:latin typeface="Microsoft YaHei" panose="020B0503020204020204" pitchFamily="34" charset="-122"/>
+              <a:ea typeface="Microsoft YaHei" panose="020B0503020204020204" pitchFamily="34" charset="-122"/>
+              <a:sym typeface="Arial"/>
+            </a:endParaRPr>
           </a:p>
         </p:txBody>
       </p:sp>
@@ -15179,16 +15752,333 @@
           </a:p>
         </p:txBody>
       </p:sp>
+      <p:pic>
+        <p:nvPicPr>
+          <p:cNvPr id="3" name="圖片 2">
+            <a:extLst>
+              <a:ext uri="{FF2B5EF4-FFF2-40B4-BE49-F238E27FC236}">
+                <a16:creationId xmlns:a16="http://schemas.microsoft.com/office/drawing/2014/main" id="{CC3ED541-2E27-C977-1CD7-9BA2718C180A}"/>
+              </a:ext>
+            </a:extLst>
+          </p:cNvPr>
+          <p:cNvPicPr>
+            <a:picLocks noChangeAspect="1"/>
+          </p:cNvPicPr>
+          <p:nvPr/>
+        </p:nvPicPr>
+        <p:blipFill>
+          <a:blip r:embed="rId3">
+            <a:extLst>
+              <a:ext uri="{28A0092B-C50C-407E-A947-70E740481C1C}">
+                <a14:useLocalDpi xmlns:a14="http://schemas.microsoft.com/office/drawing/2010/main" val="0"/>
+              </a:ext>
+            </a:extLst>
+          </a:blip>
+          <a:stretch>
+            <a:fillRect/>
+          </a:stretch>
+        </p:blipFill>
+        <p:spPr>
+          <a:xfrm>
+            <a:off x="1622777" y="970548"/>
+            <a:ext cx="7868294" cy="3616282"/>
+          </a:xfrm>
+          <a:prstGeom prst="rect">
+            <a:avLst/>
+          </a:prstGeom>
+        </p:spPr>
+      </p:pic>
+      <p:pic>
+        <p:nvPicPr>
+          <p:cNvPr id="5" name="圖片 4">
+            <a:extLst>
+              <a:ext uri="{FF2B5EF4-FFF2-40B4-BE49-F238E27FC236}">
+                <a16:creationId xmlns:a16="http://schemas.microsoft.com/office/drawing/2014/main" id="{AF0A650C-C2DB-D66F-113F-09761814837D}"/>
+              </a:ext>
+            </a:extLst>
+          </p:cNvPr>
+          <p:cNvPicPr>
+            <a:picLocks noChangeAspect="1"/>
+          </p:cNvPicPr>
+          <p:nvPr/>
+        </p:nvPicPr>
+        <p:blipFill>
+          <a:blip r:embed="rId4">
+            <a:extLst>
+              <a:ext uri="{28A0092B-C50C-407E-A947-70E740481C1C}">
+                <a14:useLocalDpi xmlns:a14="http://schemas.microsoft.com/office/drawing/2010/main" val="0"/>
+              </a:ext>
+            </a:extLst>
+          </a:blip>
+          <a:stretch>
+            <a:fillRect/>
+          </a:stretch>
+        </p:blipFill>
+        <p:spPr>
+          <a:xfrm>
+            <a:off x="1622777" y="4586830"/>
+            <a:ext cx="7975021" cy="1798476"/>
+          </a:xfrm>
+          <a:prstGeom prst="rect">
+            <a:avLst/>
+          </a:prstGeom>
+        </p:spPr>
+      </p:pic>
+    </p:spTree>
+  </p:cSld>
+  <p:clrMapOvr>
+    <a:masterClrMapping/>
+  </p:clrMapOvr>
+  <mc:AlternateContent xmlns:mc="http://schemas.openxmlformats.org/markup-compatibility/2006" xmlns:p14="http://schemas.microsoft.com/office/powerpoint/2010/main">
+    <mc:Choice Requires="p14">
+      <p:transition spd="slow" p14:dur="2000">
+        <p:cut/>
+      </p:transition>
+    </mc:Choice>
+    <mc:Fallback xmlns="">
+      <p:transition spd="slow">
+        <p:cut/>
+      </p:transition>
+    </mc:Fallback>
+  </mc:AlternateContent>
+</p:sld>
+</file>
+
+<file path=ppt/slides/slide8.xml><?xml version="1.0" encoding="utf-8"?>
+<p:sld xmlns:a="http://schemas.openxmlformats.org/drawingml/2006/main" xmlns:r="http://schemas.openxmlformats.org/officeDocument/2006/relationships" xmlns:p="http://schemas.openxmlformats.org/presentationml/2006/main">
+  <p:cSld>
+    <p:spTree>
+      <p:nvGrpSpPr>
+        <p:cNvPr id="1" name="Shape 92">
+          <a:extLst>
+            <a:ext uri="{FF2B5EF4-FFF2-40B4-BE49-F238E27FC236}">
+              <a16:creationId xmlns:a16="http://schemas.microsoft.com/office/drawing/2014/main" id="{F45C6CBF-575F-9E0E-1045-185819057777}"/>
+            </a:ext>
+          </a:extLst>
+        </p:cNvPr>
+        <p:cNvGrpSpPr/>
+        <p:nvPr/>
+      </p:nvGrpSpPr>
+      <p:grpSpPr>
+        <a:xfrm>
+          <a:off x="0" y="0"/>
+          <a:ext cx="0" cy="0"/>
+          <a:chOff x="0" y="0"/>
+          <a:chExt cx="0" cy="0"/>
+        </a:xfrm>
+      </p:grpSpPr>
       <p:sp>
         <p:nvSpPr>
-          <p:cNvPr id="94" name="Google Shape;94;p9"/>
+          <p:cNvPr id="93" name="Google Shape;93;p9">
+            <a:extLst>
+              <a:ext uri="{FF2B5EF4-FFF2-40B4-BE49-F238E27FC236}">
+                <a16:creationId xmlns:a16="http://schemas.microsoft.com/office/drawing/2014/main" id="{6C16F798-1A2C-2A39-2AF5-0E97D31A5D5E}"/>
+              </a:ext>
+            </a:extLst>
+          </p:cNvPr>
+          <p:cNvSpPr txBox="1">
+            <a:spLocks noGrp="1"/>
+          </p:cNvSpPr>
+          <p:nvPr>
+            <p:ph type="title"/>
+          </p:nvPr>
+        </p:nvSpPr>
+        <p:spPr>
+          <a:xfrm>
+            <a:off x="365895" y="150922"/>
+            <a:ext cx="11342694" cy="635226"/>
+          </a:xfrm>
+          <a:prstGeom prst="rect">
+            <a:avLst/>
+          </a:prstGeom>
+          <a:noFill/>
+          <a:ln>
+            <a:noFill/>
+          </a:ln>
+        </p:spPr>
+        <p:txBody>
+          <a:bodyPr spcFirstLastPara="1" wrap="square" lIns="91425" tIns="45700" rIns="91425" bIns="45700" anchor="ctr" anchorCtr="0">
+            <a:noAutofit/>
+          </a:bodyPr>
+          <a:lstStyle/>
+          <a:p>
+            <a:pPr marL="0" lvl="0" indent="0" algn="l" rtl="0">
+              <a:lnSpc>
+                <a:spcPct val="100000"/>
+              </a:lnSpc>
+              <a:spcBef>
+                <a:spcPts val="0"/>
+              </a:spcBef>
+              <a:spcAft>
+                <a:spcPts val="0"/>
+              </a:spcAft>
+              <a:buSzPts val="1400"/>
+              <a:buNone/>
+            </a:pPr>
+            <a:r>
+              <a:rPr lang="zh-TW" sz="2800" b="1"/>
+              <a:t>Copilot Studio 功能設定截圖與相關資料</a:t>
+            </a:r>
+            <a:endParaRPr/>
+          </a:p>
+        </p:txBody>
+      </p:sp>
+      <p:pic>
+        <p:nvPicPr>
+          <p:cNvPr id="8" name="圖片 7">
+            <a:extLst>
+              <a:ext uri="{FF2B5EF4-FFF2-40B4-BE49-F238E27FC236}">
+                <a16:creationId xmlns:a16="http://schemas.microsoft.com/office/drawing/2014/main" id="{9F2A5DF1-8FFE-082E-EDF3-A97FE3F1BFA7}"/>
+              </a:ext>
+            </a:extLst>
+          </p:cNvPr>
+          <p:cNvPicPr>
+            <a:picLocks noChangeAspect="1"/>
+          </p:cNvPicPr>
+          <p:nvPr/>
+        </p:nvPicPr>
+        <p:blipFill>
+          <a:blip r:embed="rId3">
+            <a:extLst>
+              <a:ext uri="{28A0092B-C50C-407E-A947-70E740481C1C}">
+                <a14:useLocalDpi xmlns:a14="http://schemas.microsoft.com/office/drawing/2010/main" val="0"/>
+              </a:ext>
+            </a:extLst>
+          </a:blip>
+          <a:stretch>
+            <a:fillRect/>
+          </a:stretch>
+        </p:blipFill>
+        <p:spPr>
+          <a:xfrm>
+            <a:off x="469085" y="909660"/>
+            <a:ext cx="6803782" cy="5038680"/>
+          </a:xfrm>
+          <a:prstGeom prst="rect">
+            <a:avLst/>
+          </a:prstGeom>
+        </p:spPr>
+      </p:pic>
+      <p:pic>
+        <p:nvPicPr>
+          <p:cNvPr id="3" name="圖片 2">
+            <a:extLst>
+              <a:ext uri="{FF2B5EF4-FFF2-40B4-BE49-F238E27FC236}">
+                <a16:creationId xmlns:a16="http://schemas.microsoft.com/office/drawing/2014/main" id="{79C1B7C2-DC26-9BB6-0AE7-8497B4D0D00A}"/>
+              </a:ext>
+            </a:extLst>
+          </p:cNvPr>
+          <p:cNvPicPr>
+            <a:picLocks noChangeAspect="1"/>
+          </p:cNvPicPr>
+          <p:nvPr/>
+        </p:nvPicPr>
+        <p:blipFill>
+          <a:blip r:embed="rId4">
+            <a:extLst>
+              <a:ext uri="{28A0092B-C50C-407E-A947-70E740481C1C}">
+                <a14:useLocalDpi xmlns:a14="http://schemas.microsoft.com/office/drawing/2010/main" val="0"/>
+              </a:ext>
+            </a:extLst>
+          </a:blip>
+          <a:stretch>
+            <a:fillRect/>
+          </a:stretch>
+        </p:blipFill>
+        <p:spPr>
+          <a:xfrm>
+            <a:off x="6333067" y="2353734"/>
+            <a:ext cx="5573532" cy="1533778"/>
+          </a:xfrm>
+          <a:prstGeom prst="rect">
+            <a:avLst/>
+          </a:prstGeom>
+          <a:ln>
+            <a:noFill/>
+          </a:ln>
+          <a:effectLst>
+            <a:outerShdw blurRad="292100" dist="139700" dir="2700000" algn="tl" rotWithShape="0">
+              <a:srgbClr val="333333">
+                <a:alpha val="65000"/>
+              </a:srgbClr>
+            </a:outerShdw>
+          </a:effectLst>
+        </p:spPr>
+      </p:pic>
+      <p:sp>
+        <p:nvSpPr>
+          <p:cNvPr id="6" name="箭號: 迴轉箭號 5">
+            <a:extLst>
+              <a:ext uri="{FF2B5EF4-FFF2-40B4-BE49-F238E27FC236}">
+                <a16:creationId xmlns:a16="http://schemas.microsoft.com/office/drawing/2014/main" id="{F8645C62-CA39-E07B-A96E-556977C0016F}"/>
+              </a:ext>
+            </a:extLst>
+          </p:cNvPr>
+          <p:cNvSpPr/>
+          <p:nvPr/>
+        </p:nvSpPr>
+        <p:spPr>
+          <a:xfrm rot="10800000" flipH="1">
+            <a:off x="5223933" y="3429000"/>
+            <a:ext cx="4436534" cy="2060828"/>
+          </a:xfrm>
+          <a:prstGeom prst="uturnArrow">
+            <a:avLst/>
+          </a:prstGeom>
+          <a:solidFill>
+            <a:schemeClr val="accent1">
+              <a:alpha val="47000"/>
+            </a:schemeClr>
+          </a:solidFill>
+          <a:ln>
+            <a:noFill/>
+          </a:ln>
+        </p:spPr>
+        <p:style>
+          <a:lnRef idx="2">
+            <a:schemeClr val="accent1">
+              <a:shade val="15000"/>
+            </a:schemeClr>
+          </a:lnRef>
+          <a:fillRef idx="1">
+            <a:schemeClr val="accent1"/>
+          </a:fillRef>
+          <a:effectRef idx="0">
+            <a:schemeClr val="accent1"/>
+          </a:effectRef>
+          <a:fontRef idx="minor">
+            <a:schemeClr val="lt1"/>
+          </a:fontRef>
+        </p:style>
+        <p:txBody>
+          <a:bodyPr rtlCol="0" anchor="ctr"/>
+          <a:lstStyle/>
+          <a:p>
+            <a:pPr algn="ctr"/>
+            <a:endParaRPr lang="zh-TW" altLang="en-US">
+              <a:solidFill>
+                <a:schemeClr val="tx1"/>
+              </a:solidFill>
+            </a:endParaRPr>
+          </a:p>
+        </p:txBody>
+      </p:sp>
+      <p:sp>
+        <p:nvSpPr>
+          <p:cNvPr id="7" name="Google Shape;85;g3e9888fc26a_0_5">
+            <a:extLst>
+              <a:ext uri="{FF2B5EF4-FFF2-40B4-BE49-F238E27FC236}">
+                <a16:creationId xmlns:a16="http://schemas.microsoft.com/office/drawing/2014/main" id="{77469066-6609-F7A7-7E85-48BEC75E6D2F}"/>
+              </a:ext>
+            </a:extLst>
+          </p:cNvPr>
           <p:cNvSpPr txBox="1"/>
           <p:nvPr/>
         </p:nvSpPr>
         <p:spPr>
           <a:xfrm>
-            <a:off x="365895" y="955131"/>
-            <a:ext cx="7693150" cy="369332"/>
+            <a:off x="5677631" y="4962778"/>
+            <a:ext cx="3190471" cy="646290"/>
           </a:xfrm>
           <a:prstGeom prst="rect">
             <a:avLst/>
@@ -15204,7 +16094,7 @@
           </a:bodyPr>
           <a:lstStyle/>
           <a:p>
-            <a:pPr marL="0" marR="0" lvl="0" indent="0" algn="l" defTabSz="914400" rtl="0" eaLnBrk="1" fontAlgn="auto" latinLnBrk="0" hangingPunct="1">
+            <a:pPr marL="0" marR="0" lvl="0" indent="0" algn="ctr" defTabSz="914400" rtl="0" eaLnBrk="1" fontAlgn="auto" latinLnBrk="0" hangingPunct="1">
               <a:lnSpc>
                 <a:spcPct val="100000"/>
               </a:lnSpc>
@@ -15224,114 +16114,94 @@
               <a:defRPr/>
             </a:pPr>
             <a:r>
-              <a:rPr kumimoji="0" lang="zh-TW" altLang="en-US" sz="1800" b="1" i="0" u="none" strike="noStrike" kern="0" cap="none" spc="0" normalizeH="0" baseline="0" noProof="0">
-                <a:ln>
-                  <a:noFill/>
-                </a:ln>
-                <a:solidFill>
-                  <a:srgbClr val="FF0000"/>
-                </a:solidFill>
-                <a:effectLst/>
-                <a:uLnTx/>
-                <a:uFillTx/>
-                <a:latin typeface="Microsoft JhengHei"/>
-                <a:ea typeface="Microsoft JhengHei"/>
-                <a:cs typeface="Microsoft JhengHei"/>
-                <a:sym typeface="Microsoft JhengHei"/>
-              </a:rPr>
-              <a:t>佐證 </a:t>
-            </a:r>
-            <a:r>
-              <a:rPr kumimoji="0" lang="en-US" altLang="zh-TW" sz="1800" b="1" i="0" u="none" strike="noStrike" kern="0" cap="none" spc="0" normalizeH="0" baseline="0" noProof="0">
-                <a:ln>
-                  <a:noFill/>
-                </a:ln>
-                <a:solidFill>
-                  <a:srgbClr val="FF0000"/>
-                </a:solidFill>
-                <a:effectLst/>
-                <a:uLnTx/>
-                <a:uFillTx/>
-                <a:latin typeface="Microsoft JhengHei"/>
-                <a:ea typeface="Microsoft JhengHei"/>
-                <a:cs typeface="Microsoft JhengHei"/>
-                <a:sym typeface="Microsoft JhengHei"/>
-              </a:rPr>
-              <a:t>AI Agent </a:t>
-            </a:r>
-            <a:r>
-              <a:rPr kumimoji="0" lang="zh-TW" altLang="en-US" sz="1800" b="1" i="0" u="none" strike="noStrike" kern="0" cap="none" spc="0" normalizeH="0" baseline="0" noProof="0">
-                <a:ln>
-                  <a:noFill/>
-                </a:ln>
-                <a:solidFill>
-                  <a:srgbClr val="FF0000"/>
-                </a:solidFill>
-                <a:effectLst/>
-                <a:uLnTx/>
-                <a:uFillTx/>
-                <a:latin typeface="Microsoft JhengHei"/>
-                <a:ea typeface="Microsoft JhengHei"/>
-                <a:cs typeface="Microsoft JhengHei"/>
-                <a:sym typeface="Microsoft JhengHei"/>
-              </a:rPr>
-              <a:t>設計及運行資料</a:t>
-            </a:r>
-            <a:endParaRPr kumimoji="0" sz="1400" b="0" i="0" u="none" strike="noStrike" kern="0" cap="none" spc="0" normalizeH="0" baseline="0" noProof="0">
-              <a:ln>
-                <a:noFill/>
-              </a:ln>
+              <a:rPr lang="zh-TW" altLang="en-US" sz="3600" b="1" kern="0" dirty="0">
+                <a:solidFill>
+                  <a:srgbClr val="000000"/>
+                </a:solidFill>
+                <a:latin typeface="Microsoft YaHei" panose="020B0503020204020204" pitchFamily="34" charset="-122"/>
+                <a:ea typeface="Microsoft YaHei" panose="020B0503020204020204" pitchFamily="34" charset="-122"/>
+              </a:rPr>
+              <a:t>成功發送通知</a:t>
+            </a:r>
+            <a:endParaRPr sz="3600" b="1" kern="0" dirty="0">
               <a:solidFill>
                 <a:srgbClr val="000000"/>
               </a:solidFill>
-              <a:effectLst/>
-              <a:uLnTx/>
-              <a:uFillTx/>
-              <a:latin typeface="Arial"/>
-              <a:ea typeface="Arial"/>
-              <a:cs typeface="Arial"/>
+              <a:latin typeface="Microsoft YaHei" panose="020B0503020204020204" pitchFamily="34" charset="-122"/>
+              <a:ea typeface="Microsoft YaHei" panose="020B0503020204020204" pitchFamily="34" charset="-122"/>
               <a:sym typeface="Arial"/>
             </a:endParaRPr>
           </a:p>
         </p:txBody>
       </p:sp>
-      <p:pic>
-        <p:nvPicPr>
-          <p:cNvPr id="95" name="Google Shape;95;p9"/>
-          <p:cNvPicPr preferRelativeResize="0"/>
-          <p:nvPr/>
-        </p:nvPicPr>
-        <p:blipFill rotWithShape="1">
-          <a:blip r:embed="rId3">
-            <a:alphaModFix/>
-          </a:blip>
-          <a:srcRect/>
-          <a:stretch/>
-        </p:blipFill>
-        <p:spPr>
-          <a:xfrm>
-            <a:off x="365896" y="1958419"/>
-            <a:ext cx="8293074" cy="4410015"/>
-          </a:xfrm>
-          <a:prstGeom prst="rect">
-            <a:avLst/>
-          </a:prstGeom>
-          <a:noFill/>
-          <a:ln>
-            <a:noFill/>
-          </a:ln>
-        </p:spPr>
-      </p:pic>
+    </p:spTree>
+    <p:extLst>
+      <p:ext uri="{BB962C8B-B14F-4D97-AF65-F5344CB8AC3E}">
+        <p14:creationId xmlns:p14="http://schemas.microsoft.com/office/powerpoint/2010/main" val="1849772947"/>
+      </p:ext>
+    </p:extLst>
+  </p:cSld>
+  <p:clrMapOvr>
+    <a:masterClrMapping/>
+  </p:clrMapOvr>
+  <mc:AlternateContent xmlns:mc="http://schemas.openxmlformats.org/markup-compatibility/2006" xmlns:p14="http://schemas.microsoft.com/office/powerpoint/2010/main">
+    <mc:Choice Requires="p14">
+      <p:transition spd="slow" p14:dur="2000">
+        <p:cut/>
+      </p:transition>
+    </mc:Choice>
+    <mc:Fallback xmlns="">
+      <p:transition spd="slow">
+        <p:cut/>
+      </p:transition>
+    </mc:Fallback>
+  </mc:AlternateContent>
+</p:sld>
+</file>
+
+<file path=ppt/slides/slide9.xml><?xml version="1.0" encoding="utf-8"?>
+<p:sld xmlns:a="http://schemas.openxmlformats.org/drawingml/2006/main" xmlns:r="http://schemas.openxmlformats.org/officeDocument/2006/relationships" xmlns:p="http://schemas.openxmlformats.org/presentationml/2006/main">
+  <p:cSld>
+    <p:spTree>
+      <p:nvGrpSpPr>
+        <p:cNvPr id="1" name="Shape 92">
+          <a:extLst>
+            <a:ext uri="{FF2B5EF4-FFF2-40B4-BE49-F238E27FC236}">
+              <a16:creationId xmlns:a16="http://schemas.microsoft.com/office/drawing/2014/main" id="{1BD43401-EC22-3238-BCA2-65CCCCEB4947}"/>
+            </a:ext>
+          </a:extLst>
+        </p:cNvPr>
+        <p:cNvGrpSpPr/>
+        <p:nvPr/>
+      </p:nvGrpSpPr>
+      <p:grpSpPr>
+        <a:xfrm>
+          <a:off x="0" y="0"/>
+          <a:ext cx="0" cy="0"/>
+          <a:chOff x="0" y="0"/>
+          <a:chExt cx="0" cy="0"/>
+        </a:xfrm>
+      </p:grpSpPr>
       <p:sp>
         <p:nvSpPr>
-          <p:cNvPr id="96" name="Google Shape;96;p9"/>
-          <p:cNvSpPr txBox="1"/>
-          <p:nvPr/>
+          <p:cNvPr id="93" name="Google Shape;93;p9">
+            <a:extLst>
+              <a:ext uri="{FF2B5EF4-FFF2-40B4-BE49-F238E27FC236}">
+                <a16:creationId xmlns:a16="http://schemas.microsoft.com/office/drawing/2014/main" id="{F8B9A375-8DFD-29C5-C043-DBD5BD80A38D}"/>
+              </a:ext>
+            </a:extLst>
+          </p:cNvPr>
+          <p:cNvSpPr txBox="1">
+            <a:spLocks noGrp="1"/>
+          </p:cNvSpPr>
+          <p:nvPr>
+            <p:ph type="title"/>
+          </p:nvPr>
         </p:nvSpPr>
         <p:spPr>
           <a:xfrm>
-            <a:off x="365895" y="1324463"/>
-            <a:ext cx="11342693" cy="635226"/>
+            <a:off x="365895" y="150922"/>
+            <a:ext cx="11342694" cy="635226"/>
           </a:xfrm>
           <a:prstGeom prst="rect">
             <a:avLst/>
@@ -15342,14 +16212,14 @@
           </a:ln>
         </p:spPr>
         <p:txBody>
-          <a:bodyPr spcFirstLastPara="1" wrap="square" lIns="91425" tIns="91425" rIns="91425" bIns="91425" anchor="t" anchorCtr="0">
+          <a:bodyPr spcFirstLastPara="1" wrap="square" lIns="91425" tIns="45700" rIns="91425" bIns="45700" anchor="ctr" anchorCtr="0">
             <a:noAutofit/>
           </a:bodyPr>
           <a:lstStyle/>
           <a:p>
-            <a:pPr marL="0" marR="0" lvl="0" indent="0" algn="l" defTabSz="914400" rtl="0" eaLnBrk="1" fontAlgn="auto" latinLnBrk="0" hangingPunct="1">
+            <a:pPr marL="0" lvl="0" indent="0" algn="l" rtl="0">
               <a:lnSpc>
-                <a:spcPct val="150000"/>
+                <a:spcPct val="100000"/>
               </a:lnSpc>
               <a:spcBef>
                 <a:spcPts val="0"/>
@@ -15357,88 +16227,135 @@
               <a:spcAft>
                 <a:spcPts val="0"/>
               </a:spcAft>
+              <a:buSzPts val="1400"/>
+              <a:buNone/>
+            </a:pPr>
+            <a:r>
+              <a:rPr lang="zh-TW" sz="2800" b="1"/>
+              <a:t>Copilot Studio 功能設定截圖與相關資料</a:t>
+            </a:r>
+            <a:endParaRPr/>
+          </a:p>
+        </p:txBody>
+      </p:sp>
+      <p:pic>
+        <p:nvPicPr>
+          <p:cNvPr id="4" name="圖片 3">
+            <a:extLst>
+              <a:ext uri="{FF2B5EF4-FFF2-40B4-BE49-F238E27FC236}">
+                <a16:creationId xmlns:a16="http://schemas.microsoft.com/office/drawing/2014/main" id="{320C3681-8BFE-99D9-F7A4-87E4BFDB913E}"/>
+              </a:ext>
+            </a:extLst>
+          </p:cNvPr>
+          <p:cNvPicPr>
+            <a:picLocks noChangeAspect="1"/>
+          </p:cNvPicPr>
+          <p:nvPr/>
+        </p:nvPicPr>
+        <p:blipFill>
+          <a:blip r:embed="rId3">
+            <a:extLst>
+              <a:ext uri="{28A0092B-C50C-407E-A947-70E740481C1C}">
+                <a14:useLocalDpi xmlns:a14="http://schemas.microsoft.com/office/drawing/2010/main" val="0"/>
+              </a:ext>
+            </a:extLst>
+          </a:blip>
+          <a:stretch>
+            <a:fillRect/>
+          </a:stretch>
+        </p:blipFill>
+        <p:spPr>
+          <a:xfrm>
+            <a:off x="910755" y="1371600"/>
+            <a:ext cx="10514682" cy="4684143"/>
+          </a:xfrm>
+          <a:prstGeom prst="rect">
+            <a:avLst/>
+          </a:prstGeom>
+        </p:spPr>
+      </p:pic>
+      <p:sp>
+        <p:nvSpPr>
+          <p:cNvPr id="9" name="Google Shape;85;g3e9888fc26a_0_5">
+            <a:extLst>
+              <a:ext uri="{FF2B5EF4-FFF2-40B4-BE49-F238E27FC236}">
+                <a16:creationId xmlns:a16="http://schemas.microsoft.com/office/drawing/2014/main" id="{FE3D0460-0B8D-16F7-D11A-09870669471B}"/>
+              </a:ext>
+            </a:extLst>
+          </p:cNvPr>
+          <p:cNvSpPr txBox="1"/>
+          <p:nvPr/>
+        </p:nvSpPr>
+        <p:spPr>
+          <a:xfrm>
+            <a:off x="7506431" y="4489535"/>
+            <a:ext cx="3190471" cy="646290"/>
+          </a:xfrm>
+          <a:prstGeom prst="rect">
+            <a:avLst/>
+          </a:prstGeom>
+          <a:solidFill>
+            <a:schemeClr val="bg2">
+              <a:lumMod val="40000"/>
+              <a:lumOff val="60000"/>
+            </a:schemeClr>
+          </a:solidFill>
+          <a:ln>
+            <a:noFill/>
+          </a:ln>
+        </p:spPr>
+        <p:txBody>
+          <a:bodyPr spcFirstLastPara="1" wrap="square" lIns="91425" tIns="45700" rIns="91425" bIns="45700" anchor="t" anchorCtr="0">
+            <a:spAutoFit/>
+          </a:bodyPr>
+          <a:lstStyle/>
+          <a:p>
+            <a:pPr marL="0" marR="0" lvl="0" indent="0" algn="ctr" defTabSz="914400" rtl="0" eaLnBrk="1" fontAlgn="auto" latinLnBrk="0" hangingPunct="1">
+              <a:lnSpc>
+                <a:spcPct val="100000"/>
+              </a:lnSpc>
+              <a:spcBef>
+                <a:spcPts val="0"/>
+              </a:spcBef>
+              <a:spcAft>
+                <a:spcPts val="0"/>
+              </a:spcAft>
               <a:buClr>
-                <a:srgbClr val="000000"/>
+                <a:srgbClr val="FF0000"/>
               </a:buClr>
-              <a:buSzTx/>
+              <a:buSzPts val="1800"/>
               <a:buFont typeface="Arial"/>
               <a:buNone/>
               <a:tabLst/>
               <a:defRPr/>
             </a:pPr>
             <a:r>
-              <a:rPr kumimoji="0" lang="zh-TW" altLang="en-US" sz="1400" b="0" i="0" u="none" strike="noStrike" kern="0" cap="none" spc="0" normalizeH="0" baseline="0" noProof="0" dirty="0">
-                <a:ln>
-                  <a:noFill/>
-                </a:ln>
-                <a:solidFill>
-                  <a:srgbClr val="000000"/>
-                </a:solidFill>
-                <a:effectLst/>
-                <a:uLnTx/>
-                <a:uFillTx/>
-                <a:latin typeface="Microsoft JhengHei"/>
-                <a:ea typeface="Microsoft JhengHei"/>
-                <a:cs typeface="Microsoft JhengHei"/>
-                <a:sym typeface="Microsoft JhengHei"/>
-              </a:rPr>
-              <a:t>請提供「各種關鍵功能」的設計截圖，必要時，請提供程式碼（例如：將「主題」 的程式碼匯出並另存一份 </a:t>
-            </a:r>
-            <a:r>
-              <a:rPr kumimoji="0" lang="en-US" altLang="zh-TW" sz="1400" b="0" i="0" u="none" strike="noStrike" kern="0" cap="none" spc="0" normalizeH="0" baseline="0" noProof="0" dirty="0">
-                <a:ln>
-                  <a:noFill/>
-                </a:ln>
-                <a:solidFill>
-                  <a:srgbClr val="000000"/>
-                </a:solidFill>
-                <a:effectLst/>
-                <a:uLnTx/>
-                <a:uFillTx/>
-                <a:latin typeface="Microsoft JhengHei"/>
-                <a:ea typeface="Microsoft JhengHei"/>
-                <a:cs typeface="Microsoft JhengHei"/>
-                <a:sym typeface="Microsoft JhengHei"/>
-              </a:rPr>
-              <a:t>.txt </a:t>
-            </a:r>
-            <a:r>
-              <a:rPr kumimoji="0" lang="zh-TW" altLang="en-US" sz="1400" b="0" i="0" u="none" strike="noStrike" kern="0" cap="none" spc="0" normalizeH="0" baseline="0" noProof="0" dirty="0">
-                <a:ln>
-                  <a:noFill/>
-                </a:ln>
-                <a:solidFill>
-                  <a:srgbClr val="000000"/>
-                </a:solidFill>
-                <a:effectLst/>
-                <a:uLnTx/>
-                <a:uFillTx/>
-                <a:latin typeface="Microsoft JhengHei"/>
-                <a:ea typeface="Microsoft JhengHei"/>
-                <a:cs typeface="Microsoft JhengHei"/>
-                <a:sym typeface="Microsoft JhengHei"/>
-              </a:rPr>
-              <a:t>檔案）。</a:t>
-            </a:r>
-            <a:endParaRPr kumimoji="0" sz="1400" b="0" i="0" u="none" strike="noStrike" kern="0" cap="none" spc="0" normalizeH="0" baseline="0" noProof="0" dirty="0">
-              <a:ln>
-                <a:noFill/>
-              </a:ln>
+              <a:rPr lang="zh-TW" altLang="en-US" sz="3600" b="1" kern="0" dirty="0">
+                <a:solidFill>
+                  <a:srgbClr val="000000"/>
+                </a:solidFill>
+                <a:latin typeface="Microsoft YaHei" panose="020B0503020204020204" pitchFamily="34" charset="-122"/>
+                <a:ea typeface="Microsoft YaHei" panose="020B0503020204020204" pitchFamily="34" charset="-122"/>
+              </a:rPr>
+              <a:t>指派特定工作</a:t>
+            </a:r>
+            <a:endParaRPr sz="3600" b="1" kern="0" dirty="0">
               <a:solidFill>
                 <a:srgbClr val="000000"/>
               </a:solidFill>
-              <a:effectLst/>
-              <a:uLnTx/>
-              <a:uFillTx/>
-              <a:latin typeface="Microsoft JhengHei"/>
-              <a:ea typeface="Microsoft JhengHei"/>
-              <a:cs typeface="Microsoft JhengHei"/>
-              <a:sym typeface="Microsoft JhengHei"/>
+              <a:latin typeface="Microsoft YaHei" panose="020B0503020204020204" pitchFamily="34" charset="-122"/>
+              <a:ea typeface="Microsoft YaHei" panose="020B0503020204020204" pitchFamily="34" charset="-122"/>
+              <a:sym typeface="Arial"/>
             </a:endParaRPr>
           </a:p>
         </p:txBody>
       </p:sp>
     </p:spTree>
+    <p:extLst>
+      <p:ext uri="{BB962C8B-B14F-4D97-AF65-F5344CB8AC3E}">
+        <p14:creationId xmlns:p14="http://schemas.microsoft.com/office/powerpoint/2010/main" val="1440746775"/>
+      </p:ext>
+    </p:extLst>
   </p:cSld>
   <p:clrMapOvr>
     <a:masterClrMapping/>
